--- a/Machine Learning/Unsupervised ML/Clustering/Clustering & KMeans.pptx
+++ b/Machine Learning/Unsupervised ML/Clustering/Clustering & KMeans.pptx
@@ -10,6 +10,12 @@
     <p:sldId id="258" r:id="rId4"/>
     <p:sldId id="259" r:id="rId5"/>
     <p:sldId id="260" r:id="rId6"/>
+    <p:sldId id="261" r:id="rId7"/>
+    <p:sldId id="262" r:id="rId8"/>
+    <p:sldId id="263" r:id="rId9"/>
+    <p:sldId id="264" r:id="rId10"/>
+    <p:sldId id="265" r:id="rId11"/>
+    <p:sldId id="266" r:id="rId12"/>
   </p:sldIdLst>
   <p:sldSz cx="12192000" cy="6858000"/>
   <p:notesSz cx="6858000" cy="9144000"/>
@@ -108,6 +114,11 @@
       </a:defRPr>
     </a:lvl9pPr>
   </p:defaultTextStyle>
+  <p:extLst>
+    <p:ext uri="{EFAFB233-063F-42B5-8137-9DF3F51BA10A}">
+      <p15:sldGuideLst xmlns:p15="http://schemas.microsoft.com/office/powerpoint/2012/main"/>
+    </p:ext>
+  </p:extLst>
 </p:presentation>
 </file>
 
@@ -599,7 +610,7 @@
           <a:p>
             <a:fld id="{72345051-2045-45DA-935E-2E3CA1A69ADC}" type="datetimeFigureOut">
               <a:rPr lang="en-US" smtClean="0"/>
-              <a:t>7/31/2025</a:t>
+              <a:t>8/1/2025</a:t>
             </a:fld>
             <a:endParaRPr lang="en-US" dirty="0"/>
           </a:p>
@@ -797,7 +808,7 @@
           <a:p>
             <a:fld id="{72345051-2045-45DA-935E-2E3CA1A69ADC}" type="datetimeFigureOut">
               <a:rPr lang="en-US" smtClean="0"/>
-              <a:t>7/31/2025</a:t>
+              <a:t>8/1/2025</a:t>
             </a:fld>
             <a:endParaRPr lang="en-US"/>
           </a:p>
@@ -1005,7 +1016,7 @@
           <a:p>
             <a:fld id="{72345051-2045-45DA-935E-2E3CA1A69ADC}" type="datetimeFigureOut">
               <a:rPr lang="en-US" smtClean="0"/>
-              <a:t>7/31/2025</a:t>
+              <a:t>8/1/2025</a:t>
             </a:fld>
             <a:endParaRPr lang="en-US"/>
           </a:p>
@@ -1227,7 +1238,7 @@
           <a:p>
             <a:fld id="{72345051-2045-45DA-935E-2E3CA1A69ADC}" type="datetimeFigureOut">
               <a:rPr lang="en-US" smtClean="0"/>
-              <a:t>7/31/2025</a:t>
+              <a:t>8/1/2025</a:t>
             </a:fld>
             <a:endParaRPr lang="en-US"/>
           </a:p>
@@ -2138,7 +2149,7 @@
           <a:p>
             <a:fld id="{72345051-2045-45DA-935E-2E3CA1A69ADC}" type="datetimeFigureOut">
               <a:rPr lang="en-US" smtClean="0"/>
-              <a:t>7/31/2025</a:t>
+              <a:t>8/1/2025</a:t>
             </a:fld>
             <a:endParaRPr lang="en-US"/>
           </a:p>
@@ -2741,7 +2752,7 @@
           <a:p>
             <a:fld id="{72345051-2045-45DA-935E-2E3CA1A69ADC}" type="datetimeFigureOut">
               <a:rPr lang="en-US" smtClean="0"/>
-              <a:t>7/31/2025</a:t>
+              <a:t>8/1/2025</a:t>
             </a:fld>
             <a:endParaRPr lang="en-US"/>
           </a:p>
@@ -3789,7 +3800,7 @@
           <a:p>
             <a:fld id="{72345051-2045-45DA-935E-2E3CA1A69ADC}" type="datetimeFigureOut">
               <a:rPr lang="en-US" smtClean="0"/>
-              <a:t>7/31/2025</a:t>
+              <a:t>8/1/2025</a:t>
             </a:fld>
             <a:endParaRPr lang="en-US"/>
           </a:p>
@@ -4573,7 +4584,7 @@
           <a:p>
             <a:fld id="{72345051-2045-45DA-935E-2E3CA1A69ADC}" type="datetimeFigureOut">
               <a:rPr lang="en-US" smtClean="0"/>
-              <a:t>7/31/2025</a:t>
+              <a:t>8/1/2025</a:t>
             </a:fld>
             <a:endParaRPr lang="en-US"/>
           </a:p>
@@ -5022,7 +5033,7 @@
           <a:p>
             <a:fld id="{72345051-2045-45DA-935E-2E3CA1A69ADC}" type="datetimeFigureOut">
               <a:rPr lang="en-US" smtClean="0"/>
-              <a:t>7/31/2025</a:t>
+              <a:t>8/1/2025</a:t>
             </a:fld>
             <a:endParaRPr lang="en-US"/>
           </a:p>
@@ -5339,7 +5350,7 @@
           <a:p>
             <a:fld id="{72345051-2045-45DA-935E-2E3CA1A69ADC}" type="datetimeFigureOut">
               <a:rPr lang="en-US" smtClean="0"/>
-              <a:t>7/31/2025</a:t>
+              <a:t>8/1/2025</a:t>
             </a:fld>
             <a:endParaRPr lang="en-US"/>
           </a:p>
@@ -5967,7 +5978,7 @@
           <a:p>
             <a:fld id="{72345051-2045-45DA-935E-2E3CA1A69ADC}" type="datetimeFigureOut">
               <a:rPr lang="en-US" smtClean="0"/>
-              <a:t>7/31/2025</a:t>
+              <a:t>8/1/2025</a:t>
             </a:fld>
             <a:endParaRPr lang="en-US"/>
           </a:p>
@@ -6540,7 +6551,7 @@
           <a:p>
             <a:fld id="{72345051-2045-45DA-935E-2E3CA1A69ADC}" type="datetimeFigureOut">
               <a:rPr lang="en-US" smtClean="0"/>
-              <a:t>7/31/2025</a:t>
+              <a:t>8/1/2025</a:t>
             </a:fld>
             <a:endParaRPr lang="en-US" dirty="0"/>
           </a:p>
@@ -7875,12 +7886,13 @@
           <a:p>
             <a:pPr algn="ctr"/>
             <a:r>
-              <a:rPr lang="en-US" sz="8000">
+              <a:rPr lang="en-US" sz="8000" dirty="0">
                 <a:solidFill>
                   <a:schemeClr val="bg1"/>
                 </a:solidFill>
+                <a:latin typeface="Sitka Display" panose="02000505000000020004" pitchFamily="2" charset="0"/>
               </a:rPr>
-              <a:t>Clustering</a:t>
+              <a:t>Unsupervised ML</a:t>
             </a:r>
           </a:p>
         </p:txBody>
@@ -7915,10 +7927,11 @@
           <a:p>
             <a:pPr algn="ctr"/>
             <a:r>
-              <a:rPr lang="en-US" sz="3200">
+              <a:rPr lang="en-US" sz="3200" dirty="0">
                 <a:solidFill>
                   <a:schemeClr val="bg1"/>
                 </a:solidFill>
+                <a:latin typeface="Sitka Display" panose="02000505000000020004" pitchFamily="2" charset="0"/>
               </a:rPr>
               <a:t>Ahmed Akram Amer</a:t>
             </a:r>
@@ -8334,6 +8347,848 @@
 </p:sld>
 </file>
 
+<file path=ppt/slides/slide10.xml><?xml version="1.0" encoding="utf-8"?>
+<p:sld xmlns:a="http://schemas.openxmlformats.org/drawingml/2006/main" xmlns:r="http://schemas.openxmlformats.org/officeDocument/2006/relationships" xmlns:p="http://schemas.openxmlformats.org/presentationml/2006/main">
+  <p:cSld>
+    <p:spTree>
+      <p:nvGrpSpPr>
+        <p:cNvPr id="1" name=""/>
+        <p:cNvGrpSpPr/>
+        <p:nvPr/>
+      </p:nvGrpSpPr>
+      <p:grpSpPr>
+        <a:xfrm>
+          <a:off x="0" y="0"/>
+          <a:ext cx="0" cy="0"/>
+          <a:chOff x="0" y="0"/>
+          <a:chExt cx="0" cy="0"/>
+        </a:xfrm>
+      </p:grpSpPr>
+      <p:sp>
+        <p:nvSpPr>
+          <p:cNvPr id="2" name="Title 1">
+            <a:extLst>
+              <a:ext uri="{FF2B5EF4-FFF2-40B4-BE49-F238E27FC236}">
+                <a16:creationId xmlns:a16="http://schemas.microsoft.com/office/drawing/2014/main" id="{F68EF114-ED3E-8BC7-F20E-14E3A97082C2}"/>
+              </a:ext>
+            </a:extLst>
+          </p:cNvPr>
+          <p:cNvSpPr>
+            <a:spLocks noGrp="1"/>
+          </p:cNvSpPr>
+          <p:nvPr>
+            <p:ph type="title"/>
+          </p:nvPr>
+        </p:nvSpPr>
+        <p:spPr/>
+        <p:txBody>
+          <a:bodyPr/>
+          <a:lstStyle/>
+          <a:p>
+            <a:r>
+              <a:rPr lang="en-US" dirty="0">
+                <a:latin typeface="Sitka Display" panose="02000505000000020004" pitchFamily="2" charset="0"/>
+              </a:rPr>
+              <a:t>Continue..</a:t>
+            </a:r>
+          </a:p>
+        </p:txBody>
+      </p:sp>
+      <p:sp>
+        <p:nvSpPr>
+          <p:cNvPr id="3" name="Content Placeholder 2">
+            <a:extLst>
+              <a:ext uri="{FF2B5EF4-FFF2-40B4-BE49-F238E27FC236}">
+                <a16:creationId xmlns:a16="http://schemas.microsoft.com/office/drawing/2014/main" id="{B73506B8-1B57-71FE-4DA4-0F0FF4E73EB6}"/>
+              </a:ext>
+            </a:extLst>
+          </p:cNvPr>
+          <p:cNvSpPr>
+            <a:spLocks noGrp="1"/>
+          </p:cNvSpPr>
+          <p:nvPr>
+            <p:ph idx="1"/>
+          </p:nvPr>
+        </p:nvSpPr>
+        <p:spPr/>
+        <p:txBody>
+          <a:bodyPr>
+            <a:normAutofit fontScale="77500" lnSpcReduction="20000"/>
+          </a:bodyPr>
+          <a:lstStyle/>
+          <a:p>
+            <a:pPr algn="l" fontAlgn="t">
+              <a:buFont typeface="Arial" panose="020B0604020202020204" pitchFamily="34" charset="0"/>
+              <a:buChar char="•"/>
+            </a:pPr>
+            <a:r>
+              <a:rPr lang="en-US" sz="2800" b="1" i="0" dirty="0">
+                <a:solidFill>
+                  <a:srgbClr val="141414"/>
+                </a:solidFill>
+                <a:effectLst/>
+                <a:latin typeface="Sitka Display" panose="02000505000000020004" pitchFamily="2" charset="0"/>
+              </a:rPr>
+              <a:t>Hierarchical Clustering: </a:t>
+            </a:r>
+            <a:r>
+              <a:rPr lang="en-US" sz="2800" b="0" i="0" dirty="0">
+                <a:solidFill>
+                  <a:srgbClr val="141414"/>
+                </a:solidFill>
+                <a:effectLst/>
+                <a:latin typeface="Sitka Display" panose="02000505000000020004" pitchFamily="2" charset="0"/>
+              </a:rPr>
+              <a:t>A method that builds a hierarchy of clusters either through agglomerative (bottom-up) or divisive (top-down) approaches.</a:t>
+            </a:r>
+          </a:p>
+          <a:p>
+            <a:pPr algn="l" fontAlgn="t">
+              <a:buFont typeface="Arial" panose="020B0604020202020204" pitchFamily="34" charset="0"/>
+              <a:buChar char="•"/>
+            </a:pPr>
+            <a:r>
+              <a:rPr lang="en-US" sz="2800" b="1" i="0" dirty="0">
+                <a:solidFill>
+                  <a:srgbClr val="141414"/>
+                </a:solidFill>
+                <a:effectLst/>
+                <a:latin typeface="Sitka Display" panose="02000505000000020004" pitchFamily="2" charset="0"/>
+              </a:rPr>
+              <a:t>K-Means: </a:t>
+            </a:r>
+            <a:r>
+              <a:rPr lang="en-US" sz="2800" b="0" i="0" dirty="0">
+                <a:solidFill>
+                  <a:srgbClr val="141414"/>
+                </a:solidFill>
+                <a:effectLst/>
+                <a:latin typeface="Sitka Display" panose="02000505000000020004" pitchFamily="2" charset="0"/>
+              </a:rPr>
+              <a:t>A popular clustering algorithm that partitions data into K clusters by minimizing inertia.</a:t>
+            </a:r>
+          </a:p>
+          <a:p>
+            <a:pPr algn="l" fontAlgn="t">
+              <a:buFont typeface="Arial" panose="020B0604020202020204" pitchFamily="34" charset="0"/>
+              <a:buChar char="•"/>
+            </a:pPr>
+            <a:r>
+              <a:rPr lang="en-US" sz="2800" b="1" i="0" dirty="0">
+                <a:solidFill>
+                  <a:srgbClr val="141414"/>
+                </a:solidFill>
+                <a:effectLst/>
+                <a:latin typeface="Sitka Display" panose="02000505000000020004" pitchFamily="2" charset="0"/>
+              </a:rPr>
+              <a:t>DBSCAN (Density-Based Spatial Clustering of Applications with Noise): </a:t>
+            </a:r>
+            <a:r>
+              <a:rPr lang="en-US" sz="2800" b="0" i="0" dirty="0">
+                <a:solidFill>
+                  <a:srgbClr val="141414"/>
+                </a:solidFill>
+                <a:effectLst/>
+                <a:latin typeface="Sitka Display" panose="02000505000000020004" pitchFamily="2" charset="0"/>
+              </a:rPr>
+              <a:t>A clustering algorithm that groups together points that are closely packed and marks as outliers points that lie alone in low-density regions.</a:t>
+            </a:r>
+          </a:p>
+          <a:p>
+            <a:pPr algn="l" fontAlgn="t">
+              <a:buFont typeface="Arial" panose="020B0604020202020204" pitchFamily="34" charset="0"/>
+              <a:buChar char="•"/>
+            </a:pPr>
+            <a:r>
+              <a:rPr lang="en-US" sz="2800" b="1" i="0" dirty="0">
+                <a:solidFill>
+                  <a:srgbClr val="141414"/>
+                </a:solidFill>
+                <a:effectLst/>
+                <a:latin typeface="Sitka Display" panose="02000505000000020004" pitchFamily="2" charset="0"/>
+              </a:rPr>
+              <a:t>Overfitting:</a:t>
+            </a:r>
+            <a:r>
+              <a:rPr lang="en-US" sz="2800" b="0" i="0" dirty="0">
+                <a:solidFill>
+                  <a:srgbClr val="141414"/>
+                </a:solidFill>
+                <a:effectLst/>
+                <a:latin typeface="Sitka Display" panose="02000505000000020004" pitchFamily="2" charset="0"/>
+              </a:rPr>
+              <a:t> A situation where a clustering model captures noise in the data rather than the underlying pattern, leading to poor generalization.</a:t>
+            </a:r>
+          </a:p>
+          <a:p>
+            <a:pPr algn="l" fontAlgn="t">
+              <a:buFont typeface="Arial" panose="020B0604020202020204" pitchFamily="34" charset="0"/>
+              <a:buChar char="•"/>
+            </a:pPr>
+            <a:r>
+              <a:rPr lang="en-US" sz="2800" b="1" i="0" dirty="0">
+                <a:solidFill>
+                  <a:srgbClr val="141414"/>
+                </a:solidFill>
+                <a:effectLst/>
+                <a:latin typeface="Sitka Display" panose="02000505000000020004" pitchFamily="2" charset="0"/>
+              </a:rPr>
+              <a:t>Dimensionality Reduction: </a:t>
+            </a:r>
+            <a:r>
+              <a:rPr lang="en-US" sz="2800" b="0" i="0" dirty="0">
+                <a:solidFill>
+                  <a:srgbClr val="141414"/>
+                </a:solidFill>
+                <a:effectLst/>
+                <a:latin typeface="Sitka Display" panose="02000505000000020004" pitchFamily="2" charset="0"/>
+              </a:rPr>
+              <a:t>Techniques like PCA (Principal Component Analysis) used to reduce the number of features in the data while preserving its structure, often applied before clustering.</a:t>
+            </a:r>
+          </a:p>
+          <a:p>
+            <a:endParaRPr lang="en-US" dirty="0">
+              <a:latin typeface="Sitka Display" panose="02000505000000020004" pitchFamily="2" charset="0"/>
+            </a:endParaRPr>
+          </a:p>
+        </p:txBody>
+      </p:sp>
+    </p:spTree>
+    <p:extLst>
+      <p:ext uri="{BB962C8B-B14F-4D97-AF65-F5344CB8AC3E}">
+        <p14:creationId xmlns:p14="http://schemas.microsoft.com/office/powerpoint/2010/main" val="93362717"/>
+      </p:ext>
+    </p:extLst>
+  </p:cSld>
+  <p:clrMapOvr>
+    <a:masterClrMapping/>
+  </p:clrMapOvr>
+</p:sld>
+</file>
+
+<file path=ppt/slides/slide11.xml><?xml version="1.0" encoding="utf-8"?>
+<p:sld xmlns:a="http://schemas.openxmlformats.org/drawingml/2006/main" xmlns:r="http://schemas.openxmlformats.org/officeDocument/2006/relationships" xmlns:p="http://schemas.openxmlformats.org/presentationml/2006/main">
+  <p:cSld>
+    <p:bg>
+      <p:bgPr>
+        <a:solidFill>
+          <a:schemeClr val="bg1"/>
+        </a:solidFill>
+        <a:effectLst/>
+      </p:bgPr>
+    </p:bg>
+    <p:spTree>
+      <p:nvGrpSpPr>
+        <p:cNvPr id="1" name=""/>
+        <p:cNvGrpSpPr/>
+        <p:nvPr/>
+      </p:nvGrpSpPr>
+      <p:grpSpPr>
+        <a:xfrm>
+          <a:off x="0" y="0"/>
+          <a:ext cx="0" cy="0"/>
+          <a:chOff x="0" y="0"/>
+          <a:chExt cx="0" cy="0"/>
+        </a:xfrm>
+      </p:grpSpPr>
+      <p:sp>
+        <p:nvSpPr>
+          <p:cNvPr id="17" name="Rectangle 16">
+            <a:extLst>
+              <a:ext uri="{FF2B5EF4-FFF2-40B4-BE49-F238E27FC236}">
+                <a16:creationId xmlns:a16="http://schemas.microsoft.com/office/drawing/2014/main" id="{DA381740-063A-41A4-836D-85D14980EEF0}"/>
+              </a:ext>
+              <a:ext uri="{C183D7F6-B498-43B3-948B-1728B52AA6E4}">
+                <adec:decorative xmlns:adec="http://schemas.microsoft.com/office/drawing/2017/decorative" val="1"/>
+              </a:ext>
+            </a:extLst>
+          </p:cNvPr>
+          <p:cNvSpPr>
+            <a:spLocks noGrp="1" noRot="1" noChangeAspect="1" noMove="1" noResize="1" noEditPoints="1" noAdjustHandles="1" noChangeArrowheads="1" noChangeShapeType="1" noTextEdit="1"/>
+          </p:cNvSpPr>
+          <p:nvPr>
+            <p:extLst>
+              <p:ext uri="{386F3935-93C4-4BCD-93E2-E3B085C9AB24}">
+                <p16:designElem xmlns:p16="http://schemas.microsoft.com/office/powerpoint/2015/main" val="1"/>
+              </p:ext>
+            </p:extLst>
+          </p:nvPr>
+        </p:nvSpPr>
+        <p:spPr>
+          <a:xfrm>
+            <a:off x="838200" y="4736883"/>
+            <a:ext cx="4243589" cy="27432"/>
+          </a:xfrm>
+          <a:custGeom>
+            <a:avLst/>
+            <a:gdLst>
+              <a:gd name="connsiteX0" fmla="*/ 0 w 4243589"/>
+              <a:gd name="connsiteY0" fmla="*/ 0 h 27432"/>
+              <a:gd name="connsiteX1" fmla="*/ 563791 w 4243589"/>
+              <a:gd name="connsiteY1" fmla="*/ 0 h 27432"/>
+              <a:gd name="connsiteX2" fmla="*/ 1042710 w 4243589"/>
+              <a:gd name="connsiteY2" fmla="*/ 0 h 27432"/>
+              <a:gd name="connsiteX3" fmla="*/ 1564066 w 4243589"/>
+              <a:gd name="connsiteY3" fmla="*/ 0 h 27432"/>
+              <a:gd name="connsiteX4" fmla="*/ 2212729 w 4243589"/>
+              <a:gd name="connsiteY4" fmla="*/ 0 h 27432"/>
+              <a:gd name="connsiteX5" fmla="*/ 2776520 w 4243589"/>
+              <a:gd name="connsiteY5" fmla="*/ 0 h 27432"/>
+              <a:gd name="connsiteX6" fmla="*/ 3297875 w 4243589"/>
+              <a:gd name="connsiteY6" fmla="*/ 0 h 27432"/>
+              <a:gd name="connsiteX7" fmla="*/ 4243589 w 4243589"/>
+              <a:gd name="connsiteY7" fmla="*/ 0 h 27432"/>
+              <a:gd name="connsiteX8" fmla="*/ 4243589 w 4243589"/>
+              <a:gd name="connsiteY8" fmla="*/ 27432 h 27432"/>
+              <a:gd name="connsiteX9" fmla="*/ 3637362 w 4243589"/>
+              <a:gd name="connsiteY9" fmla="*/ 27432 h 27432"/>
+              <a:gd name="connsiteX10" fmla="*/ 3116007 w 4243589"/>
+              <a:gd name="connsiteY10" fmla="*/ 27432 h 27432"/>
+              <a:gd name="connsiteX11" fmla="*/ 2424908 w 4243589"/>
+              <a:gd name="connsiteY11" fmla="*/ 27432 h 27432"/>
+              <a:gd name="connsiteX12" fmla="*/ 1861117 w 4243589"/>
+              <a:gd name="connsiteY12" fmla="*/ 27432 h 27432"/>
+              <a:gd name="connsiteX13" fmla="*/ 1382198 w 4243589"/>
+              <a:gd name="connsiteY13" fmla="*/ 27432 h 27432"/>
+              <a:gd name="connsiteX14" fmla="*/ 733535 w 4243589"/>
+              <a:gd name="connsiteY14" fmla="*/ 27432 h 27432"/>
+              <a:gd name="connsiteX15" fmla="*/ 0 w 4243589"/>
+              <a:gd name="connsiteY15" fmla="*/ 27432 h 27432"/>
+              <a:gd name="connsiteX16" fmla="*/ 0 w 4243589"/>
+              <a:gd name="connsiteY16" fmla="*/ 0 h 27432"/>
+            </a:gdLst>
+            <a:ahLst/>
+            <a:cxnLst>
+              <a:cxn ang="0">
+                <a:pos x="connsiteX0" y="connsiteY0"/>
+              </a:cxn>
+              <a:cxn ang="0">
+                <a:pos x="connsiteX1" y="connsiteY1"/>
+              </a:cxn>
+              <a:cxn ang="0">
+                <a:pos x="connsiteX2" y="connsiteY2"/>
+              </a:cxn>
+              <a:cxn ang="0">
+                <a:pos x="connsiteX3" y="connsiteY3"/>
+              </a:cxn>
+              <a:cxn ang="0">
+                <a:pos x="connsiteX4" y="connsiteY4"/>
+              </a:cxn>
+              <a:cxn ang="0">
+                <a:pos x="connsiteX5" y="connsiteY5"/>
+              </a:cxn>
+              <a:cxn ang="0">
+                <a:pos x="connsiteX6" y="connsiteY6"/>
+              </a:cxn>
+              <a:cxn ang="0">
+                <a:pos x="connsiteX7" y="connsiteY7"/>
+              </a:cxn>
+              <a:cxn ang="0">
+                <a:pos x="connsiteX8" y="connsiteY8"/>
+              </a:cxn>
+              <a:cxn ang="0">
+                <a:pos x="connsiteX9" y="connsiteY9"/>
+              </a:cxn>
+              <a:cxn ang="0">
+                <a:pos x="connsiteX10" y="connsiteY10"/>
+              </a:cxn>
+              <a:cxn ang="0">
+                <a:pos x="connsiteX11" y="connsiteY11"/>
+              </a:cxn>
+              <a:cxn ang="0">
+                <a:pos x="connsiteX12" y="connsiteY12"/>
+              </a:cxn>
+              <a:cxn ang="0">
+                <a:pos x="connsiteX13" y="connsiteY13"/>
+              </a:cxn>
+              <a:cxn ang="0">
+                <a:pos x="connsiteX14" y="connsiteY14"/>
+              </a:cxn>
+              <a:cxn ang="0">
+                <a:pos x="connsiteX15" y="connsiteY15"/>
+              </a:cxn>
+              <a:cxn ang="0">
+                <a:pos x="connsiteX16" y="connsiteY16"/>
+              </a:cxn>
+            </a:cxnLst>
+            <a:rect l="l" t="t" r="r" b="b"/>
+            <a:pathLst>
+              <a:path w="4243589" h="27432" fill="none" extrusionOk="0">
+                <a:moveTo>
+                  <a:pt x="0" y="0"/>
+                </a:moveTo>
+                <a:cubicBezTo>
+                  <a:pt x="157351" y="-15653"/>
+                  <a:pt x="378877" y="-5828"/>
+                  <a:pt x="563791" y="0"/>
+                </a:cubicBezTo>
+                <a:cubicBezTo>
+                  <a:pt x="748705" y="5828"/>
+                  <a:pt x="905659" y="-5525"/>
+                  <a:pt x="1042710" y="0"/>
+                </a:cubicBezTo>
+                <a:cubicBezTo>
+                  <a:pt x="1179761" y="5525"/>
+                  <a:pt x="1356845" y="-21288"/>
+                  <a:pt x="1564066" y="0"/>
+                </a:cubicBezTo>
+                <a:cubicBezTo>
+                  <a:pt x="1771287" y="21288"/>
+                  <a:pt x="1912099" y="25135"/>
+                  <a:pt x="2212729" y="0"/>
+                </a:cubicBezTo>
+                <a:cubicBezTo>
+                  <a:pt x="2513359" y="-25135"/>
+                  <a:pt x="2514918" y="-27119"/>
+                  <a:pt x="2776520" y="0"/>
+                </a:cubicBezTo>
+                <a:cubicBezTo>
+                  <a:pt x="3038122" y="27119"/>
+                  <a:pt x="3178771" y="18116"/>
+                  <a:pt x="3297875" y="0"/>
+                </a:cubicBezTo>
+                <a:cubicBezTo>
+                  <a:pt x="3416980" y="-18116"/>
+                  <a:pt x="4012240" y="-40869"/>
+                  <a:pt x="4243589" y="0"/>
+                </a:cubicBezTo>
+                <a:cubicBezTo>
+                  <a:pt x="4242616" y="8304"/>
+                  <a:pt x="4243111" y="21512"/>
+                  <a:pt x="4243589" y="27432"/>
+                </a:cubicBezTo>
+                <a:cubicBezTo>
+                  <a:pt x="4112949" y="6289"/>
+                  <a:pt x="3928037" y="10975"/>
+                  <a:pt x="3637362" y="27432"/>
+                </a:cubicBezTo>
+                <a:cubicBezTo>
+                  <a:pt x="3346687" y="43889"/>
+                  <a:pt x="3254446" y="35813"/>
+                  <a:pt x="3116007" y="27432"/>
+                </a:cubicBezTo>
+                <a:cubicBezTo>
+                  <a:pt x="2977569" y="19051"/>
+                  <a:pt x="2620228" y="38017"/>
+                  <a:pt x="2424908" y="27432"/>
+                </a:cubicBezTo>
+                <a:cubicBezTo>
+                  <a:pt x="2229588" y="16847"/>
+                  <a:pt x="2088287" y="5290"/>
+                  <a:pt x="1861117" y="27432"/>
+                </a:cubicBezTo>
+                <a:cubicBezTo>
+                  <a:pt x="1633947" y="49574"/>
+                  <a:pt x="1502447" y="8273"/>
+                  <a:pt x="1382198" y="27432"/>
+                </a:cubicBezTo>
+                <a:cubicBezTo>
+                  <a:pt x="1261949" y="46591"/>
+                  <a:pt x="1045440" y="37497"/>
+                  <a:pt x="733535" y="27432"/>
+                </a:cubicBezTo>
+                <a:cubicBezTo>
+                  <a:pt x="421630" y="17367"/>
+                  <a:pt x="341257" y="-9215"/>
+                  <a:pt x="0" y="27432"/>
+                </a:cubicBezTo>
+                <a:cubicBezTo>
+                  <a:pt x="-1048" y="14992"/>
+                  <a:pt x="-1120" y="7447"/>
+                  <a:pt x="0" y="0"/>
+                </a:cubicBezTo>
+                <a:close/>
+              </a:path>
+              <a:path w="4243589" h="27432" stroke="0" extrusionOk="0">
+                <a:moveTo>
+                  <a:pt x="0" y="0"/>
+                </a:moveTo>
+                <a:cubicBezTo>
+                  <a:pt x="128164" y="17204"/>
+                  <a:pt x="312653" y="1129"/>
+                  <a:pt x="563791" y="0"/>
+                </a:cubicBezTo>
+                <a:cubicBezTo>
+                  <a:pt x="814929" y="-1129"/>
+                  <a:pt x="837271" y="8503"/>
+                  <a:pt x="1042710" y="0"/>
+                </a:cubicBezTo>
+                <a:cubicBezTo>
+                  <a:pt x="1248149" y="-8503"/>
+                  <a:pt x="1588432" y="-28862"/>
+                  <a:pt x="1733809" y="0"/>
+                </a:cubicBezTo>
+                <a:cubicBezTo>
+                  <a:pt x="1879186" y="28862"/>
+                  <a:pt x="2052815" y="5974"/>
+                  <a:pt x="2297600" y="0"/>
+                </a:cubicBezTo>
+                <a:cubicBezTo>
+                  <a:pt x="2542385" y="-5974"/>
+                  <a:pt x="2699960" y="-23550"/>
+                  <a:pt x="2861391" y="0"/>
+                </a:cubicBezTo>
+                <a:cubicBezTo>
+                  <a:pt x="3022822" y="23550"/>
+                  <a:pt x="3390411" y="25272"/>
+                  <a:pt x="3552490" y="0"/>
+                </a:cubicBezTo>
+                <a:cubicBezTo>
+                  <a:pt x="3714569" y="-25272"/>
+                  <a:pt x="3950585" y="-31327"/>
+                  <a:pt x="4243589" y="0"/>
+                </a:cubicBezTo>
+                <a:cubicBezTo>
+                  <a:pt x="4244074" y="9333"/>
+                  <a:pt x="4244867" y="19699"/>
+                  <a:pt x="4243589" y="27432"/>
+                </a:cubicBezTo>
+                <a:cubicBezTo>
+                  <a:pt x="4130424" y="7904"/>
+                  <a:pt x="3932803" y="51393"/>
+                  <a:pt x="3722234" y="27432"/>
+                </a:cubicBezTo>
+                <a:cubicBezTo>
+                  <a:pt x="3511665" y="3471"/>
+                  <a:pt x="3269903" y="55138"/>
+                  <a:pt x="3116007" y="27432"/>
+                </a:cubicBezTo>
+                <a:cubicBezTo>
+                  <a:pt x="2962111" y="-274"/>
+                  <a:pt x="2744280" y="32368"/>
+                  <a:pt x="2509780" y="27432"/>
+                </a:cubicBezTo>
+                <a:cubicBezTo>
+                  <a:pt x="2275280" y="22496"/>
+                  <a:pt x="2066059" y="52808"/>
+                  <a:pt x="1945989" y="27432"/>
+                </a:cubicBezTo>
+                <a:cubicBezTo>
+                  <a:pt x="1825919" y="2056"/>
+                  <a:pt x="1407329" y="21760"/>
+                  <a:pt x="1254890" y="27432"/>
+                </a:cubicBezTo>
+                <a:cubicBezTo>
+                  <a:pt x="1102451" y="33104"/>
+                  <a:pt x="837950" y="40817"/>
+                  <a:pt x="563791" y="27432"/>
+                </a:cubicBezTo>
+                <a:cubicBezTo>
+                  <a:pt x="289632" y="14047"/>
+                  <a:pt x="132768" y="16249"/>
+                  <a:pt x="0" y="27432"/>
+                </a:cubicBezTo>
+                <a:cubicBezTo>
+                  <a:pt x="211" y="18145"/>
+                  <a:pt x="120" y="6480"/>
+                  <a:pt x="0" y="0"/>
+                </a:cubicBezTo>
+                <a:close/>
+              </a:path>
+            </a:pathLst>
+          </a:custGeom>
+          <a:solidFill>
+            <a:schemeClr val="tx1"/>
+          </a:solidFill>
+          <a:ln w="38100" cap="rnd">
+            <a:solidFill>
+              <a:schemeClr val="tx1"/>
+            </a:solidFill>
+            <a:round/>
+            <a:extLst>
+              <a:ext uri="{C807C97D-BFC1-408E-A445-0C87EB9F89A2}">
+                <ask:lineSketchStyleProps xmlns:ask="http://schemas.microsoft.com/office/drawing/2018/sketchyshapes" sd="1219033472">
+                  <a:prstGeom prst="rect">
+                    <a:avLst/>
+                  </a:prstGeom>
+                  <ask:type>
+                    <ask:lineSketchFreehand/>
+                  </ask:type>
+                </ask:lineSketchStyleProps>
+              </a:ext>
+            </a:extLst>
+          </a:ln>
+        </p:spPr>
+        <p:style>
+          <a:lnRef idx="2">
+            <a:schemeClr val="accent1">
+              <a:shade val="50000"/>
+            </a:schemeClr>
+          </a:lnRef>
+          <a:fillRef idx="1">
+            <a:schemeClr val="accent1"/>
+          </a:fillRef>
+          <a:effectRef idx="0">
+            <a:schemeClr val="accent1"/>
+          </a:effectRef>
+          <a:fontRef idx="minor">
+            <a:schemeClr val="lt1"/>
+          </a:fontRef>
+        </p:style>
+        <p:txBody>
+          <a:bodyPr rtlCol="0" anchor="ctr"/>
+          <a:lstStyle/>
+          <a:p>
+            <a:pPr algn="ctr"/>
+            <a:endParaRPr lang="en-US">
+              <a:solidFill>
+                <a:schemeClr val="tx1"/>
+              </a:solidFill>
+            </a:endParaRPr>
+          </a:p>
+        </p:txBody>
+      </p:sp>
+      <p:sp useBgFill="1">
+        <p:nvSpPr>
+          <p:cNvPr id="19" name="Rectangle 18">
+            <a:extLst>
+              <a:ext uri="{FF2B5EF4-FFF2-40B4-BE49-F238E27FC236}">
+                <a16:creationId xmlns:a16="http://schemas.microsoft.com/office/drawing/2014/main" id="{0671A8AE-40A1-4631-A6B8-581AFF065482}"/>
+              </a:ext>
+              <a:ext uri="{C183D7F6-B498-43B3-948B-1728B52AA6E4}">
+                <adec:decorative xmlns:adec="http://schemas.microsoft.com/office/drawing/2017/decorative" val="1"/>
+              </a:ext>
+            </a:extLst>
+          </p:cNvPr>
+          <p:cNvSpPr>
+            <a:spLocks noGrp="1" noRot="1" noChangeAspect="1" noMove="1" noResize="1" noEditPoints="1" noAdjustHandles="1" noChangeArrowheads="1" noChangeShapeType="1" noTextEdit="1"/>
+          </p:cNvSpPr>
+          <p:nvPr>
+            <p:extLst>
+              <p:ext uri="{386F3935-93C4-4BCD-93E2-E3B085C9AB24}">
+                <p16:designElem xmlns:p16="http://schemas.microsoft.com/office/powerpoint/2015/main" val="1"/>
+              </p:ext>
+            </p:extLst>
+          </p:nvPr>
+        </p:nvSpPr>
+        <p:spPr>
+          <a:xfrm>
+            <a:off x="0" y="0"/>
+            <a:ext cx="12192000" cy="6858000"/>
+          </a:xfrm>
+          <a:prstGeom prst="rect">
+            <a:avLst/>
+          </a:prstGeom>
+          <a:ln>
+            <a:noFill/>
+          </a:ln>
+        </p:spPr>
+        <p:style>
+          <a:lnRef idx="2">
+            <a:schemeClr val="accent1">
+              <a:shade val="50000"/>
+            </a:schemeClr>
+          </a:lnRef>
+          <a:fillRef idx="1">
+            <a:schemeClr val="accent1"/>
+          </a:fillRef>
+          <a:effectRef idx="0">
+            <a:schemeClr val="accent1"/>
+          </a:effectRef>
+          <a:fontRef idx="minor">
+            <a:schemeClr val="lt1"/>
+          </a:fontRef>
+        </p:style>
+        <p:txBody>
+          <a:bodyPr rtlCol="0" anchor="ctr"/>
+          <a:lstStyle/>
+          <a:p>
+            <a:pPr algn="ctr"/>
+            <a:endParaRPr lang="en-US"/>
+          </a:p>
+        </p:txBody>
+      </p:sp>
+      <p:pic>
+        <p:nvPicPr>
+          <p:cNvPr id="4" name="Picture 3" descr="Magnifying glass and question mark">
+            <a:extLst>
+              <a:ext uri="{FF2B5EF4-FFF2-40B4-BE49-F238E27FC236}">
+                <a16:creationId xmlns:a16="http://schemas.microsoft.com/office/drawing/2014/main" id="{CE3B3D24-0283-676E-9CD7-A038A19B9903}"/>
+              </a:ext>
+            </a:extLst>
+          </p:cNvPr>
+          <p:cNvPicPr>
+            <a:picLocks noChangeAspect="1"/>
+          </p:cNvPicPr>
+          <p:nvPr/>
+        </p:nvPicPr>
+        <p:blipFill>
+          <a:blip r:embed="rId2"/>
+          <a:srcRect/>
+          <a:stretch>
+            <a:fillRect/>
+          </a:stretch>
+        </p:blipFill>
+        <p:spPr>
+          <a:xfrm>
+            <a:off x="20" y="10"/>
+            <a:ext cx="12191980" cy="6857990"/>
+          </a:xfrm>
+          <a:prstGeom prst="rect">
+            <a:avLst/>
+          </a:prstGeom>
+        </p:spPr>
+      </p:pic>
+      <p:sp>
+        <p:nvSpPr>
+          <p:cNvPr id="21" name="Rectangle 20">
+            <a:extLst>
+              <a:ext uri="{FF2B5EF4-FFF2-40B4-BE49-F238E27FC236}">
+                <a16:creationId xmlns:a16="http://schemas.microsoft.com/office/drawing/2014/main" id="{A44CD100-6267-4E62-AA64-2182A3A6A1C0}"/>
+              </a:ext>
+              <a:ext uri="{C183D7F6-B498-43B3-948B-1728B52AA6E4}">
+                <adec:decorative xmlns:adec="http://schemas.microsoft.com/office/drawing/2017/decorative" val="1"/>
+              </a:ext>
+            </a:extLst>
+          </p:cNvPr>
+          <p:cNvSpPr>
+            <a:spLocks noGrp="1" noRot="1" noChangeAspect="1" noMove="1" noResize="1" noEditPoints="1" noAdjustHandles="1" noChangeArrowheads="1" noChangeShapeType="1" noTextEdit="1"/>
+          </p:cNvSpPr>
+          <p:nvPr>
+            <p:extLst>
+              <p:ext uri="{386F3935-93C4-4BCD-93E2-E3B085C9AB24}">
+                <p16:designElem xmlns:p16="http://schemas.microsoft.com/office/powerpoint/2015/main" val="1"/>
+              </p:ext>
+            </p:extLst>
+          </p:nvPr>
+        </p:nvSpPr>
+        <p:spPr>
+          <a:xfrm>
+            <a:off x="3" y="0"/>
+            <a:ext cx="9339206" cy="6858000"/>
+          </a:xfrm>
+          <a:prstGeom prst="rect">
+            <a:avLst/>
+          </a:prstGeom>
+          <a:gradFill>
+            <a:gsLst>
+              <a:gs pos="58000">
+                <a:schemeClr val="tx1">
+                  <a:alpha val="30000"/>
+                </a:schemeClr>
+              </a:gs>
+              <a:gs pos="33000">
+                <a:schemeClr val="tx1">
+                  <a:alpha val="20000"/>
+                </a:schemeClr>
+              </a:gs>
+              <a:gs pos="0">
+                <a:schemeClr val="tx1">
+                  <a:alpha val="0"/>
+                </a:schemeClr>
+              </a:gs>
+              <a:gs pos="100000">
+                <a:schemeClr val="tx1">
+                  <a:alpha val="30000"/>
+                </a:schemeClr>
+              </a:gs>
+            </a:gsLst>
+            <a:lin ang="10800000" scaled="0"/>
+          </a:gradFill>
+          <a:ln>
+            <a:noFill/>
+          </a:ln>
+        </p:spPr>
+        <p:style>
+          <a:lnRef idx="2">
+            <a:schemeClr val="accent1">
+              <a:shade val="50000"/>
+            </a:schemeClr>
+          </a:lnRef>
+          <a:fillRef idx="1">
+            <a:schemeClr val="accent1"/>
+          </a:fillRef>
+          <a:effectRef idx="0">
+            <a:schemeClr val="accent1"/>
+          </a:effectRef>
+          <a:fontRef idx="minor">
+            <a:schemeClr val="lt1"/>
+          </a:fontRef>
+        </p:style>
+        <p:txBody>
+          <a:bodyPr rtlCol="0" anchor="ctr"/>
+          <a:lstStyle/>
+          <a:p>
+            <a:pPr algn="ctr"/>
+            <a:endParaRPr lang="en-US" dirty="0"/>
+          </a:p>
+        </p:txBody>
+      </p:sp>
+      <p:sp>
+        <p:nvSpPr>
+          <p:cNvPr id="2" name="Title 1">
+            <a:extLst>
+              <a:ext uri="{FF2B5EF4-FFF2-40B4-BE49-F238E27FC236}">
+                <a16:creationId xmlns:a16="http://schemas.microsoft.com/office/drawing/2014/main" id="{A5F390D4-062B-2205-7FC2-D8CCF8E5E52E}"/>
+              </a:ext>
+            </a:extLst>
+          </p:cNvPr>
+          <p:cNvSpPr>
+            <a:spLocks noGrp="1"/>
+          </p:cNvSpPr>
+          <p:nvPr>
+            <p:ph type="title"/>
+          </p:nvPr>
+        </p:nvSpPr>
+        <p:spPr>
+          <a:xfrm>
+            <a:off x="477981" y="1122362"/>
+            <a:ext cx="4023360" cy="2802219"/>
+          </a:xfrm>
+        </p:spPr>
+        <p:txBody>
+          <a:bodyPr vert="horz" lIns="91440" tIns="45720" rIns="91440" bIns="45720" rtlCol="0" anchor="b">
+            <a:normAutofit/>
+          </a:bodyPr>
+          <a:lstStyle/>
+          <a:p>
+            <a:r>
+              <a:rPr lang="en-US" sz="4800" dirty="0">
+                <a:solidFill>
+                  <a:schemeClr val="bg1"/>
+                </a:solidFill>
+              </a:rPr>
+              <a:t>Q &amp; A</a:t>
+            </a:r>
+            <a:br>
+              <a:rPr lang="en-US" sz="4800" dirty="0">
+                <a:solidFill>
+                  <a:schemeClr val="bg1"/>
+                </a:solidFill>
+              </a:rPr>
+            </a:br>
+            <a:r>
+              <a:rPr lang="en-US" sz="2400" dirty="0" err="1">
+                <a:solidFill>
+                  <a:schemeClr val="bg1"/>
+                </a:solidFill>
+                <a:latin typeface="Sitka Display" panose="02000505000000020004" pitchFamily="2" charset="0"/>
+                <a:hlinkClick r:id="rId3" action="ppaction://hlinkfile"/>
+              </a:rPr>
+              <a:t>Linkedin</a:t>
+            </a:r>
+            <a:endParaRPr lang="en-US" sz="2400" dirty="0">
+              <a:solidFill>
+                <a:schemeClr val="bg1"/>
+              </a:solidFill>
+              <a:latin typeface="Sitka Display" panose="02000505000000020004" pitchFamily="2" charset="0"/>
+            </a:endParaRPr>
+          </a:p>
+        </p:txBody>
+      </p:sp>
+    </p:spTree>
+    <p:extLst>
+      <p:ext uri="{BB962C8B-B14F-4D97-AF65-F5344CB8AC3E}">
+        <p14:creationId xmlns:p14="http://schemas.microsoft.com/office/powerpoint/2010/main" val="1355131547"/>
+      </p:ext>
+    </p:extLst>
+  </p:cSld>
+  <p:clrMapOvr>
+    <a:masterClrMapping/>
+  </p:clrMapOvr>
+</p:sld>
+</file>
+
 <file path=ppt/slides/slide2.xml><?xml version="1.0" encoding="utf-8"?>
 <p:sld xmlns:a="http://schemas.openxmlformats.org/drawingml/2006/main" xmlns:r="http://schemas.openxmlformats.org/officeDocument/2006/relationships" xmlns:p="http://schemas.openxmlformats.org/presentationml/2006/main">
   <p:cSld>
@@ -8448,7 +9303,9 @@
           <a:lstStyle/>
           <a:p>
             <a:r>
-              <a:rPr lang="en-US" sz="7200"/>
+              <a:rPr lang="en-US" sz="7200" dirty="0">
+                <a:latin typeface="Sitka Display" panose="02000505000000020004" pitchFamily="2" charset="0"/>
+              </a:rPr>
               <a:t>Agenda</a:t>
             </a:r>
           </a:p>
@@ -8815,8 +9672,8 @@
         </p:nvSpPr>
         <p:spPr bwMode="auto">
           <a:xfrm>
-            <a:off x="5297762" y="2706624"/>
-            <a:ext cx="6251110" cy="3483864"/>
+            <a:off x="4590854" y="2706624"/>
+            <a:ext cx="6958018" cy="3483864"/>
           </a:xfrm>
           <a:prstGeom prst="rect">
             <a:avLst/>
@@ -8871,14 +9728,14 @@
               </a:spcAft>
             </a:pPr>
             <a:r>
-              <a:rPr kumimoji="0" lang="en-US" altLang="en-US" sz="2200" b="0" i="0" u="none" strike="noStrike" cap="none" normalizeH="0" baseline="0">
+              <a:rPr kumimoji="0" lang="en-US" altLang="en-US" sz="2200" b="0" i="0" u="none" strike="noStrike" cap="none" normalizeH="0" baseline="0" dirty="0">
                 <a:ln>
                   <a:noFill/>
                 </a:ln>
                 <a:effectLst/>
-                <a:latin typeface="Arial" panose="020B0604020202020204" pitchFamily="34" charset="0"/>
+                <a:latin typeface="Sitka Display" panose="02000505000000020004" pitchFamily="2" charset="0"/>
               </a:rPr>
-              <a:t>What is Clustering?</a:t>
+              <a:t>What is Unsupervised ML?</a:t>
             </a:r>
           </a:p>
           <a:p>
@@ -8894,15 +9751,18 @@
               </a:spcAft>
             </a:pPr>
             <a:r>
-              <a:rPr kumimoji="0" lang="en-US" altLang="en-US" sz="2200" b="0" i="0" u="none" strike="noStrike" cap="none" normalizeH="0" baseline="0">
-                <a:ln>
-                  <a:noFill/>
-                </a:ln>
-                <a:effectLst/>
-                <a:latin typeface="Arial" panose="020B0604020202020204" pitchFamily="34" charset="0"/>
+              <a:rPr lang="en-US" altLang="en-US" sz="2200" dirty="0">
+                <a:latin typeface="Sitka Display" panose="02000505000000020004" pitchFamily="2" charset="0"/>
               </a:rPr>
-              <a:t>Why Clustering?</a:t>
-            </a:r>
+              <a:t>Difference between Supervised and Unsupervised.</a:t>
+            </a:r>
+            <a:endParaRPr kumimoji="0" lang="en-US" altLang="en-US" sz="2200" b="0" i="0" u="none" strike="noStrike" cap="none" normalizeH="0" baseline="0" dirty="0">
+              <a:ln>
+                <a:noFill/>
+              </a:ln>
+              <a:effectLst/>
+              <a:latin typeface="Sitka Display" panose="02000505000000020004" pitchFamily="2" charset="0"/>
+            </a:endParaRPr>
           </a:p>
           <a:p>
             <a:pPr eaLnBrk="0" fontAlgn="base" hangingPunct="0">
@@ -8917,15 +9777,18 @@
               </a:spcAft>
             </a:pPr>
             <a:r>
-              <a:rPr kumimoji="0" lang="en-US" altLang="en-US" sz="2200" b="0" i="0" u="none" strike="noStrike" cap="none" normalizeH="0" baseline="0">
-                <a:ln>
-                  <a:noFill/>
-                </a:ln>
-                <a:effectLst/>
-                <a:latin typeface="Arial" panose="020B0604020202020204" pitchFamily="34" charset="0"/>
+              <a:rPr lang="en-US" altLang="en-US" sz="2200" dirty="0">
+                <a:latin typeface="Sitka Display" panose="02000505000000020004" pitchFamily="2" charset="0"/>
               </a:rPr>
-              <a:t>Types of Clustering</a:t>
-            </a:r>
+              <a:t>Main Tasks</a:t>
+            </a:r>
+            <a:endParaRPr kumimoji="0" lang="en-US" altLang="en-US" sz="2200" b="0" i="0" u="none" strike="noStrike" cap="none" normalizeH="0" baseline="0" dirty="0">
+              <a:ln>
+                <a:noFill/>
+              </a:ln>
+              <a:effectLst/>
+              <a:latin typeface="Sitka Display" panose="02000505000000020004" pitchFamily="2" charset="0"/>
+            </a:endParaRPr>
           </a:p>
           <a:p>
             <a:pPr eaLnBrk="0" fontAlgn="base" hangingPunct="0">
@@ -8940,14 +9803,14 @@
               </a:spcAft>
             </a:pPr>
             <a:r>
-              <a:rPr kumimoji="0" lang="en-US" altLang="en-US" sz="2200" b="0" i="0" u="none" strike="noStrike" cap="none" normalizeH="0" baseline="0">
+              <a:rPr kumimoji="0" lang="en-US" altLang="en-US" sz="2200" b="0" i="0" u="none" strike="noStrike" cap="none" normalizeH="0" baseline="0" dirty="0">
                 <a:ln>
                   <a:noFill/>
                 </a:ln>
                 <a:effectLst/>
-                <a:latin typeface="Arial" panose="020B0604020202020204" pitchFamily="34" charset="0"/>
+                <a:latin typeface="Sitka Display" panose="02000505000000020004" pitchFamily="2" charset="0"/>
               </a:rPr>
-              <a:t>K-Means Clustering (main focus)</a:t>
+              <a:t>Clustering (main focus)</a:t>
             </a:r>
           </a:p>
           <a:p>
@@ -8963,14 +9826,14 @@
               </a:spcAft>
             </a:pPr>
             <a:r>
-              <a:rPr kumimoji="0" lang="en-US" altLang="en-US" sz="2200" b="0" i="0" u="none" strike="noStrike" cap="none" normalizeH="0" baseline="0">
+              <a:rPr kumimoji="0" lang="en-US" altLang="en-US" sz="2200" b="0" i="0" u="none" strike="noStrike" cap="none" normalizeH="0" baseline="0" dirty="0">
                 <a:ln>
                   <a:noFill/>
                 </a:ln>
                 <a:effectLst/>
-                <a:latin typeface="Arial" panose="020B0604020202020204" pitchFamily="34" charset="0"/>
+                <a:latin typeface="Sitka Display" panose="02000505000000020004" pitchFamily="2" charset="0"/>
               </a:rPr>
-              <a:t>Real-World Applications</a:t>
+              <a:t>Key Terminologies</a:t>
             </a:r>
           </a:p>
           <a:p>
@@ -8986,15 +9849,18 @@
               </a:spcAft>
             </a:pPr>
             <a:r>
-              <a:rPr kumimoji="0" lang="en-US" altLang="en-US" sz="2200" b="0" i="0" u="none" strike="noStrike" cap="none" normalizeH="0" baseline="0">
-                <a:ln>
-                  <a:noFill/>
-                </a:ln>
-                <a:effectLst/>
-                <a:latin typeface="Arial" panose="020B0604020202020204" pitchFamily="34" charset="0"/>
+              <a:rPr lang="en-US" altLang="en-US" sz="2200" dirty="0">
+                <a:latin typeface="Sitka Display" panose="02000505000000020004" pitchFamily="2" charset="0"/>
               </a:rPr>
-              <a:t>Key Terminologies</a:t>
-            </a:r>
+              <a:t>K-Means Algorithm</a:t>
+            </a:r>
+            <a:endParaRPr kumimoji="0" lang="en-US" altLang="en-US" sz="2200" b="0" i="0" u="none" strike="noStrike" cap="none" normalizeH="0" baseline="0" dirty="0">
+              <a:ln>
+                <a:noFill/>
+              </a:ln>
+              <a:effectLst/>
+              <a:latin typeface="Sitka Display" panose="02000505000000020004" pitchFamily="2" charset="0"/>
+            </a:endParaRPr>
           </a:p>
           <a:p>
             <a:pPr eaLnBrk="0" fontAlgn="base" hangingPunct="0">
@@ -9009,12 +9875,12 @@
               </a:spcAft>
             </a:pPr>
             <a:r>
-              <a:rPr kumimoji="0" lang="en-US" altLang="en-US" sz="2200" b="0" i="0" u="none" strike="noStrike" cap="none" normalizeH="0" baseline="0">
+              <a:rPr kumimoji="0" lang="en-US" altLang="en-US" sz="2200" b="0" i="0" u="none" strike="noStrike" cap="none" normalizeH="0" baseline="0" dirty="0">
                 <a:ln>
                   <a:noFill/>
                 </a:ln>
                 <a:effectLst/>
-                <a:latin typeface="Arial" panose="020B0604020202020204" pitchFamily="34" charset="0"/>
+                <a:latin typeface="Sitka Display" panose="02000505000000020004" pitchFamily="2" charset="0"/>
               </a:rPr>
               <a:t>Python Implementation</a:t>
             </a:r>
@@ -9032,12 +9898,12 @@
               </a:spcAft>
             </a:pPr>
             <a:r>
-              <a:rPr kumimoji="0" lang="en-US" altLang="en-US" sz="2200" b="0" i="0" u="none" strike="noStrike" cap="none" normalizeH="0" baseline="0">
+              <a:rPr kumimoji="0" lang="en-US" altLang="en-US" sz="2200" b="0" i="0" u="none" strike="noStrike" cap="none" normalizeH="0" baseline="0" dirty="0">
                 <a:ln>
                   <a:noFill/>
                 </a:ln>
                 <a:effectLst/>
-                <a:latin typeface="Arial" panose="020B0604020202020204" pitchFamily="34" charset="0"/>
+                <a:latin typeface="Sitka Display" panose="02000505000000020004" pitchFamily="2" charset="0"/>
               </a:rPr>
               <a:t>Summary &amp; Q&amp;A</a:t>
             </a:r>
@@ -9314,8 +10180,10 @@
           <a:lstStyle/>
           <a:p>
             <a:r>
-              <a:rPr lang="en-US" sz="7200"/>
-              <a:t>What Is clustering ..?</a:t>
+              <a:rPr lang="en-US" sz="7200" dirty="0">
+                <a:latin typeface="Sitka Display" panose="02000505000000020004" pitchFamily="2" charset="0"/>
+              </a:rPr>
+              <a:t>What Is Unsupervised ML ..?</a:t>
             </a:r>
           </a:p>
         </p:txBody>
@@ -9958,43 +10826,6 @@
           </a:p>
         </p:txBody>
       </p:sp>
-      <p:pic>
-        <p:nvPicPr>
-          <p:cNvPr id="6" name="Picture 5" descr="A diagram of multiple colored circles&#10;&#10;Description automatically generated">
-            <a:extLst>
-              <a:ext uri="{FF2B5EF4-FFF2-40B4-BE49-F238E27FC236}">
-                <a16:creationId xmlns:a16="http://schemas.microsoft.com/office/drawing/2014/main" id="{AAF3D3AE-F581-A080-7770-45AAF8238CB1}"/>
-              </a:ext>
-            </a:extLst>
-          </p:cNvPr>
-          <p:cNvPicPr>
-            <a:picLocks noChangeAspect="1"/>
-          </p:cNvPicPr>
-          <p:nvPr/>
-        </p:nvPicPr>
-        <p:blipFill>
-          <a:blip r:embed="rId2">
-            <a:extLst>
-              <a:ext uri="{28A0092B-C50C-407E-A947-70E740481C1C}">
-                <a14:useLocalDpi xmlns:a14="http://schemas.microsoft.com/office/drawing/2010/main" val="0"/>
-              </a:ext>
-            </a:extLst>
-          </a:blip>
-          <a:srcRect l="2257" r="20058" b="-1"/>
-          <a:stretch>
-            <a:fillRect/>
-          </a:stretch>
-        </p:blipFill>
-        <p:spPr>
-          <a:xfrm>
-            <a:off x="572492" y="2089604"/>
-            <a:ext cx="3941064" cy="4096511"/>
-          </a:xfrm>
-          <a:prstGeom prst="rect">
-            <a:avLst/>
-          </a:prstGeom>
-        </p:spPr>
-      </p:pic>
       <p:sp>
         <p:nvSpPr>
           <p:cNvPr id="3" name="Content Placeholder 2">
@@ -10013,8 +10844,8 @@
         </p:nvSpPr>
         <p:spPr>
           <a:xfrm>
-            <a:off x="4905955" y="2071316"/>
-            <a:ext cx="6713552" cy="4096511"/>
+            <a:off x="707010" y="2071316"/>
+            <a:ext cx="10912497" cy="4096511"/>
           </a:xfrm>
         </p:spPr>
         <p:txBody>
@@ -10024,20 +10855,41 @@
           <a:lstStyle/>
           <a:p>
             <a:r>
-              <a:rPr lang="en-US" b="1" i="0">
+              <a:rPr lang="en-US" b="1" i="0" dirty="0">
                 <a:effectLst/>
-                <a:latin typeface="Work Sans" panose="020F0502020204030204" pitchFamily="2" charset="0"/>
+                <a:latin typeface="Sitka Display" panose="02000505000000020004" pitchFamily="2" charset="0"/>
               </a:rPr>
-              <a:t>“Clustering</a:t>
-            </a:r>
-            <a:r>
-              <a:rPr lang="en-US" b="0" i="0">
+              <a:t>Unsupervised ML</a:t>
+            </a:r>
+            <a:r>
+              <a:rPr lang="en-US" b="0" i="0" dirty="0">
                 <a:effectLst/>
-                <a:latin typeface="Work Sans" panose="020F0502020204030204" pitchFamily="2" charset="0"/>
+                <a:latin typeface="Sitka Display" panose="02000505000000020004" pitchFamily="2" charset="0"/>
               </a:rPr>
-              <a:t> is the task of dividing the population or data points into several groups such that data points in the same groups are more similar to other data points in the same group than those in other groups.”</a:t>
-            </a:r>
-            <a:endParaRPr lang="en-US" dirty="0"/>
+              <a:t> </a:t>
+            </a:r>
+            <a:r>
+              <a:rPr lang="en-US" dirty="0">
+                <a:latin typeface="Sitka Display" panose="02000505000000020004" pitchFamily="2" charset="0"/>
+              </a:rPr>
+              <a:t>: branch of Machine Learning that deals with unlabeled data</a:t>
+            </a:r>
+          </a:p>
+          <a:p>
+            <a:r>
+              <a:rPr lang="en-US" dirty="0">
+                <a:latin typeface="Sitka Display" panose="02000505000000020004" pitchFamily="2" charset="0"/>
+              </a:rPr>
+              <a:t>Unsupervised ML Algorithms are tasked to find patterns and relationships within data without any prior knowledge.</a:t>
+            </a:r>
+          </a:p>
+          <a:p>
+            <a:r>
+              <a:rPr lang="en-US" dirty="0">
+                <a:latin typeface="Sitka Display" panose="02000505000000020004" pitchFamily="2" charset="0"/>
+              </a:rPr>
+              <a:t>The Training Model has only the input parameters values and discover the groups or hidden patterns on its own</a:t>
+            </a:r>
           </a:p>
         </p:txBody>
       </p:sp>
@@ -10092,35 +10944,357 @@
           <a:bodyPr/>
           <a:lstStyle/>
           <a:p>
-            <a:endParaRPr lang="en-US"/>
+            <a:r>
+              <a:rPr lang="en-US" dirty="0">
+                <a:latin typeface="Sitka Display" panose="02000505000000020004" pitchFamily="2" charset="0"/>
+              </a:rPr>
+              <a:t>The Difference</a:t>
+            </a:r>
           </a:p>
         </p:txBody>
       </p:sp>
-      <p:sp>
-        <p:nvSpPr>
-          <p:cNvPr id="3" name="Content Placeholder 2">
+      <p:graphicFrame>
+        <p:nvGraphicFramePr>
+          <p:cNvPr id="4" name="Content Placeholder 3">
             <a:extLst>
               <a:ext uri="{FF2B5EF4-FFF2-40B4-BE49-F238E27FC236}">
-                <a16:creationId xmlns:a16="http://schemas.microsoft.com/office/drawing/2014/main" id="{50075776-58AC-C322-17A6-05C0A482E2D0}"/>
+                <a16:creationId xmlns:a16="http://schemas.microsoft.com/office/drawing/2014/main" id="{E23ED3A1-B912-6E90-EB67-63885B9BC37F}"/>
               </a:ext>
             </a:extLst>
           </p:cNvPr>
-          <p:cNvSpPr>
-            <a:spLocks noGrp="1"/>
-          </p:cNvSpPr>
+          <p:cNvGraphicFramePr>
+            <a:graphicFrameLocks noGrp="1"/>
+          </p:cNvGraphicFramePr>
           <p:nvPr>
             <p:ph idx="1"/>
+            <p:extLst>
+              <p:ext uri="{D42A27DB-BD31-4B8C-83A1-F6EECF244321}">
+                <p14:modId xmlns:p14="http://schemas.microsoft.com/office/powerpoint/2010/main" val="1687851349"/>
+              </p:ext>
+            </p:extLst>
           </p:nvPr>
-        </p:nvSpPr>
-        <p:spPr/>
-        <p:txBody>
-          <a:bodyPr/>
-          <a:lstStyle/>
-          <a:p>
-            <a:endParaRPr lang="en-US"/>
-          </a:p>
-        </p:txBody>
-      </p:sp>
+        </p:nvGraphicFramePr>
+        <p:xfrm>
+          <a:off x="838200" y="1843972"/>
+          <a:ext cx="10515600" cy="6918960"/>
+        </p:xfrm>
+        <a:graphic>
+          <a:graphicData uri="http://schemas.openxmlformats.org/drawingml/2006/table">
+            <a:tbl>
+              <a:tblPr firstRow="1" bandRow="1">
+                <a:tableStyleId>{073A0DAA-6AF3-43AB-8588-CEC1D06C72B9}</a:tableStyleId>
+              </a:tblPr>
+              <a:tblGrid>
+                <a:gridCol w="5257800">
+                  <a:extLst>
+                    <a:ext uri="{9D8B030D-6E8A-4147-A177-3AD203B41FA5}">
+                      <a16:colId xmlns:a16="http://schemas.microsoft.com/office/drawing/2014/main" val="2417379248"/>
+                    </a:ext>
+                  </a:extLst>
+                </a:gridCol>
+                <a:gridCol w="5257800">
+                  <a:extLst>
+                    <a:ext uri="{9D8B030D-6E8A-4147-A177-3AD203B41FA5}">
+                      <a16:colId xmlns:a16="http://schemas.microsoft.com/office/drawing/2014/main" val="2791898845"/>
+                    </a:ext>
+                  </a:extLst>
+                </a:gridCol>
+              </a:tblGrid>
+              <a:tr h="370840">
+                <a:tc>
+                  <a:txBody>
+                    <a:bodyPr/>
+                    <a:lstStyle/>
+                    <a:p>
+                      <a:r>
+                        <a:rPr lang="en-US" sz="3600" u="sng" dirty="0">
+                          <a:latin typeface="Sitka Display" panose="02000505000000020004" pitchFamily="2" charset="0"/>
+                        </a:rPr>
+                        <a:t>Supervised ML</a:t>
+                      </a:r>
+                    </a:p>
+                  </a:txBody>
+                  <a:tcPr/>
+                </a:tc>
+                <a:tc>
+                  <a:txBody>
+                    <a:bodyPr/>
+                    <a:lstStyle/>
+                    <a:p>
+                      <a:r>
+                        <a:rPr lang="en-US" sz="3600" b="1" u="sng" dirty="0">
+                          <a:latin typeface="Sitka Display" panose="02000505000000020004" pitchFamily="2" charset="0"/>
+                        </a:rPr>
+                        <a:t>Unsupervised ML</a:t>
+                      </a:r>
+                    </a:p>
+                  </a:txBody>
+                  <a:tcPr/>
+                </a:tc>
+                <a:extLst>
+                  <a:ext uri="{0D108BD9-81ED-4DB2-BD59-A6C34878D82A}">
+                    <a16:rowId xmlns:a16="http://schemas.microsoft.com/office/drawing/2014/main" val="3412530018"/>
+                  </a:ext>
+                </a:extLst>
+              </a:tr>
+              <a:tr h="370840">
+                <a:tc>
+                  <a:txBody>
+                    <a:bodyPr/>
+                    <a:lstStyle/>
+                    <a:p>
+                      <a:r>
+                        <a:rPr lang="en-US" sz="2800" dirty="0">
+                          <a:latin typeface="Sitka Display" panose="02000505000000020004" pitchFamily="2" charset="0"/>
+                        </a:rPr>
+                        <a:t>  Uses Labeled Data (Inputs + Corresponding Output)</a:t>
+                      </a:r>
+                    </a:p>
+                  </a:txBody>
+                  <a:tcPr/>
+                </a:tc>
+                <a:tc>
+                  <a:txBody>
+                    <a:bodyPr/>
+                    <a:lstStyle/>
+                    <a:p>
+                      <a:r>
+                        <a:rPr lang="en-US" sz="2800" dirty="0">
+                          <a:latin typeface="Sitka Display" panose="02000505000000020004" pitchFamily="2" charset="0"/>
+                        </a:rPr>
+                        <a:t>  Uses Unlabeled Data ( Inputs and No Outputs)</a:t>
+                      </a:r>
+                    </a:p>
+                  </a:txBody>
+                  <a:tcPr/>
+                </a:tc>
+                <a:extLst>
+                  <a:ext uri="{0D108BD9-81ED-4DB2-BD59-A6C34878D82A}">
+                    <a16:rowId xmlns:a16="http://schemas.microsoft.com/office/drawing/2014/main" val="4095052344"/>
+                  </a:ext>
+                </a:extLst>
+              </a:tr>
+              <a:tr h="370840">
+                <a:tc>
+                  <a:txBody>
+                    <a:bodyPr/>
+                    <a:lstStyle/>
+                    <a:p>
+                      <a:pPr algn="ctr" rtl="0" fontAlgn="base"/>
+                      <a:r>
+                        <a:rPr lang="en-US" sz="2800" b="0" dirty="0">
+                          <a:effectLst/>
+                          <a:latin typeface="Sitka Display" panose="02000505000000020004" pitchFamily="2" charset="0"/>
+                        </a:rPr>
+                        <a:t>Predicts outcomes or classifies data based on known labels.</a:t>
+                      </a:r>
+                    </a:p>
+                  </a:txBody>
+                  <a:tcPr marL="95250" marR="95250" marT="133350" marB="133350" anchor="ctr"/>
+                </a:tc>
+                <a:tc>
+                  <a:txBody>
+                    <a:bodyPr/>
+                    <a:lstStyle/>
+                    <a:p>
+                      <a:pPr algn="ctr" rtl="0" fontAlgn="base"/>
+                      <a:r>
+                        <a:rPr lang="en-US" sz="2800" b="0" dirty="0">
+                          <a:effectLst/>
+                          <a:latin typeface="Sitka Display" panose="02000505000000020004" pitchFamily="2" charset="0"/>
+                        </a:rPr>
+                        <a:t>Discovers hidden patterns, structures, or groupings in data.</a:t>
+                      </a:r>
+                    </a:p>
+                  </a:txBody>
+                  <a:tcPr marL="95250" marR="95250" marT="133350" marB="133350" anchor="ctr"/>
+                </a:tc>
+                <a:extLst>
+                  <a:ext uri="{0D108BD9-81ED-4DB2-BD59-A6C34878D82A}">
+                    <a16:rowId xmlns:a16="http://schemas.microsoft.com/office/drawing/2014/main" val="3343973681"/>
+                  </a:ext>
+                </a:extLst>
+              </a:tr>
+              <a:tr h="370840">
+                <a:tc>
+                  <a:txBody>
+                    <a:bodyPr/>
+                    <a:lstStyle/>
+                    <a:p>
+                      <a:pPr algn="ctr" fontAlgn="ctr"/>
+                      <a:r>
+                        <a:rPr lang="en-US" sz="2800" b="0" dirty="0">
+                          <a:effectLst/>
+                          <a:latin typeface="Sitka Display" panose="02000505000000020004" pitchFamily="2" charset="0"/>
+                        </a:rPr>
+                        <a:t>Less complex, as the model learns from labeled data with clear guidance.</a:t>
+                      </a:r>
+                    </a:p>
+                  </a:txBody>
+                  <a:tcPr marL="95250" marR="95250" marT="133350" marB="133350" anchor="ctr"/>
+                </a:tc>
+                <a:tc>
+                  <a:txBody>
+                    <a:bodyPr/>
+                    <a:lstStyle/>
+                    <a:p>
+                      <a:pPr algn="ctr" fontAlgn="ctr"/>
+                      <a:r>
+                        <a:rPr lang="en-US" sz="2800" b="0" dirty="0">
+                          <a:effectLst/>
+                          <a:latin typeface="Sitka Display" panose="02000505000000020004" pitchFamily="2" charset="0"/>
+                        </a:rPr>
+                        <a:t>More complex, as the model must find patterns without any guidance.</a:t>
+                      </a:r>
+                    </a:p>
+                  </a:txBody>
+                  <a:tcPr marL="95250" marR="95250" marT="133350" marB="133350" anchor="ctr"/>
+                </a:tc>
+                <a:extLst>
+                  <a:ext uri="{0D108BD9-81ED-4DB2-BD59-A6C34878D82A}">
+                    <a16:rowId xmlns:a16="http://schemas.microsoft.com/office/drawing/2014/main" val="1792122935"/>
+                  </a:ext>
+                </a:extLst>
+              </a:tr>
+              <a:tr h="370840">
+                <a:tc>
+                  <a:txBody>
+                    <a:bodyPr/>
+                    <a:lstStyle/>
+                    <a:p>
+                      <a:pPr algn="ctr" fontAlgn="ctr"/>
+                      <a:r>
+                        <a:rPr lang="en-US" sz="2800" b="0" dirty="0">
+                          <a:effectLst/>
+                          <a:latin typeface="Sitka Display" panose="02000505000000020004" pitchFamily="2" charset="0"/>
+                        </a:rPr>
+                        <a:t>Two types : </a:t>
+                      </a:r>
+                      <a:r>
+                        <a:rPr lang="en-US" sz="2800" b="1" dirty="0">
+                          <a:effectLst/>
+                          <a:latin typeface="Sitka Display" panose="02000505000000020004" pitchFamily="2" charset="0"/>
+                        </a:rPr>
+                        <a:t>Classification</a:t>
+                      </a:r>
+                      <a:r>
+                        <a:rPr lang="en-US" sz="2800" b="0" dirty="0">
+                          <a:effectLst/>
+                          <a:latin typeface="Sitka Display" panose="02000505000000020004" pitchFamily="2" charset="0"/>
+                        </a:rPr>
+                        <a:t> (for discrete outputs) or </a:t>
+                      </a:r>
+                      <a:r>
+                        <a:rPr lang="en-US" sz="2800" b="1" dirty="0">
+                          <a:effectLst/>
+                          <a:latin typeface="Sitka Display" panose="02000505000000020004" pitchFamily="2" charset="0"/>
+                        </a:rPr>
+                        <a:t>regression</a:t>
+                      </a:r>
+                      <a:r>
+                        <a:rPr lang="en-US" sz="2800" b="0" dirty="0">
+                          <a:effectLst/>
+                          <a:latin typeface="Sitka Display" panose="02000505000000020004" pitchFamily="2" charset="0"/>
+                        </a:rPr>
+                        <a:t> (for continuous outputs).</a:t>
+                      </a:r>
+                    </a:p>
+                  </a:txBody>
+                  <a:tcPr marL="95250" marR="95250" marT="133350" marB="133350" anchor="ctr"/>
+                </a:tc>
+                <a:tc>
+                  <a:txBody>
+                    <a:bodyPr/>
+                    <a:lstStyle/>
+                    <a:p>
+                      <a:pPr algn="ctr" fontAlgn="ctr"/>
+                      <a:r>
+                        <a:rPr lang="en-US" sz="2800" b="0" dirty="0">
+                          <a:effectLst/>
+                          <a:latin typeface="Sitka Display" panose="02000505000000020004" pitchFamily="2" charset="0"/>
+                        </a:rPr>
+                        <a:t>C</a:t>
+                      </a:r>
+                      <a:r>
+                        <a:rPr lang="en-US" sz="2800" b="1" dirty="0">
+                          <a:effectLst/>
+                          <a:latin typeface="Sitka Display" panose="02000505000000020004" pitchFamily="2" charset="0"/>
+                        </a:rPr>
+                        <a:t>lustering</a:t>
+                      </a:r>
+                      <a:r>
+                        <a:rPr lang="en-US" sz="2800" b="0" dirty="0">
+                          <a:effectLst/>
+                          <a:latin typeface="Sitka Display" panose="02000505000000020004" pitchFamily="2" charset="0"/>
+                        </a:rPr>
+                        <a:t> and </a:t>
+                      </a:r>
+                      <a:r>
+                        <a:rPr lang="en-US" sz="2800" b="1" dirty="0">
+                          <a:effectLst/>
+                          <a:latin typeface="Sitka Display" panose="02000505000000020004" pitchFamily="2" charset="0"/>
+                        </a:rPr>
+                        <a:t>association</a:t>
+                      </a:r>
+                      <a:endParaRPr lang="en-US" sz="2800" b="0" dirty="0">
+                        <a:effectLst/>
+                        <a:latin typeface="Sitka Display" panose="02000505000000020004" pitchFamily="2" charset="0"/>
+                      </a:endParaRPr>
+                    </a:p>
+                  </a:txBody>
+                  <a:tcPr marL="95250" marR="95250" marT="133350" marB="133350" anchor="ctr"/>
+                </a:tc>
+                <a:extLst>
+                  <a:ext uri="{0D108BD9-81ED-4DB2-BD59-A6C34878D82A}">
+                    <a16:rowId xmlns:a16="http://schemas.microsoft.com/office/drawing/2014/main" val="2822572379"/>
+                  </a:ext>
+                </a:extLst>
+              </a:tr>
+              <a:tr h="370840">
+                <a:tc>
+                  <a:txBody>
+                    <a:bodyPr/>
+                    <a:lstStyle/>
+                    <a:p>
+                      <a:pPr algn="ctr" fontAlgn="ctr"/>
+                      <a:r>
+                        <a:rPr lang="en-US" sz="2800" b="0" dirty="0">
+                          <a:effectLst/>
+                          <a:latin typeface="Sitka Display" panose="02000505000000020004" pitchFamily="2" charset="0"/>
+                        </a:rPr>
+                        <a:t>Model can be tested and evaluated using labeled test data.</a:t>
+                      </a:r>
+                    </a:p>
+                  </a:txBody>
+                  <a:tcPr marL="95250" marR="95250" marT="133350" marB="133350" anchor="ctr"/>
+                </a:tc>
+                <a:tc>
+                  <a:txBody>
+                    <a:bodyPr/>
+                    <a:lstStyle/>
+                    <a:p>
+                      <a:pPr algn="ctr" fontAlgn="ctr"/>
+                      <a:r>
+                        <a:rPr lang="en-US" sz="2800" b="0" dirty="0">
+                          <a:effectLst/>
+                          <a:latin typeface="Sitka Display" panose="02000505000000020004" pitchFamily="2" charset="0"/>
+                        </a:rPr>
+                        <a:t>Cannot be tested in the traditional sense, as there are no labels.</a:t>
+                      </a:r>
+                    </a:p>
+                  </a:txBody>
+                  <a:tcPr marL="95250" marR="95250" marT="133350" marB="133350" anchor="ctr"/>
+                </a:tc>
+                <a:extLst>
+                  <a:ext uri="{0D108BD9-81ED-4DB2-BD59-A6C34878D82A}">
+                    <a16:rowId xmlns:a16="http://schemas.microsoft.com/office/drawing/2014/main" val="446567122"/>
+                  </a:ext>
+                </a:extLst>
+              </a:tr>
+            </a:tbl>
+          </a:graphicData>
+        </a:graphic>
+      </p:graphicFrame>
     </p:spTree>
     <p:extLst>
       <p:ext uri="{BB962C8B-B14F-4D97-AF65-F5344CB8AC3E}">
@@ -10172,7 +11346,12 @@
           <a:bodyPr/>
           <a:lstStyle/>
           <a:p>
-            <a:endParaRPr lang="en-US"/>
+            <a:r>
+              <a:rPr lang="en-US" dirty="0">
+                <a:latin typeface="Sitka Display" panose="02000505000000020004" pitchFamily="2" charset="0"/>
+              </a:rPr>
+              <a:t>Main tasks</a:t>
+            </a:r>
           </a:p>
         </p:txBody>
       </p:sp>
@@ -10194,10 +11373,142 @@
         </p:nvSpPr>
         <p:spPr/>
         <p:txBody>
-          <a:bodyPr/>
+          <a:bodyPr>
+            <a:normAutofit fontScale="92500" lnSpcReduction="20000"/>
+          </a:bodyPr>
           <a:lstStyle/>
           <a:p>
-            <a:endParaRPr lang="en-US"/>
+            <a:r>
+              <a:rPr lang="en-US" b="1" dirty="0">
+                <a:latin typeface="Sitka Display" panose="02000505000000020004" pitchFamily="2" charset="0"/>
+              </a:rPr>
+              <a:t>1- Clustering</a:t>
+            </a:r>
+          </a:p>
+          <a:p>
+            <a:pPr lvl="1" fontAlgn="t"/>
+            <a:r>
+              <a:rPr lang="en-US" sz="2800" b="0" i="0" dirty="0">
+                <a:solidFill>
+                  <a:srgbClr val="141414"/>
+                </a:solidFill>
+                <a:effectLst/>
+                <a:latin typeface="Sitka Display" panose="02000505000000020004" pitchFamily="2" charset="0"/>
+              </a:rPr>
+              <a:t>Groups similar data points together based on features.</a:t>
+            </a:r>
+          </a:p>
+          <a:p>
+            <a:pPr lvl="1" fontAlgn="t"/>
+            <a:r>
+              <a:rPr lang="en-US" sz="2800" b="0" i="0" dirty="0">
+                <a:solidFill>
+                  <a:srgbClr val="141414"/>
+                </a:solidFill>
+                <a:effectLst/>
+                <a:latin typeface="Sitka Display" panose="02000505000000020004" pitchFamily="2" charset="0"/>
+              </a:rPr>
+              <a:t>Common algorithms: K-means, hierarchical clustering, DBSCAN</a:t>
+            </a:r>
+            <a:r>
+              <a:rPr lang="en-US" sz="1600" b="0" i="0" dirty="0">
+                <a:solidFill>
+                  <a:srgbClr val="141414"/>
+                </a:solidFill>
+                <a:effectLst/>
+                <a:latin typeface="Sitka Display" panose="02000505000000020004" pitchFamily="2" charset="0"/>
+              </a:rPr>
+              <a:t>.</a:t>
+            </a:r>
+            <a:endParaRPr lang="en-US" dirty="0">
+              <a:latin typeface="Sitka Display" panose="02000505000000020004" pitchFamily="2" charset="0"/>
+            </a:endParaRPr>
+          </a:p>
+          <a:p>
+            <a:r>
+              <a:rPr lang="en-US" b="1" dirty="0">
+                <a:latin typeface="Sitka Display" panose="02000505000000020004" pitchFamily="2" charset="0"/>
+              </a:rPr>
+              <a:t>2- Association</a:t>
+            </a:r>
+          </a:p>
+          <a:p>
+            <a:pPr lvl="1" fontAlgn="t"/>
+            <a:r>
+              <a:rPr lang="en-US" b="0" i="0" dirty="0">
+                <a:solidFill>
+                  <a:srgbClr val="141414"/>
+                </a:solidFill>
+                <a:effectLst/>
+                <a:latin typeface="Sitka Display" panose="02000505000000020004" pitchFamily="2" charset="0"/>
+              </a:rPr>
+              <a:t>Discovers interesting relationships between variables in large datasets.</a:t>
+            </a:r>
+          </a:p>
+          <a:p>
+            <a:pPr lvl="1" fontAlgn="t"/>
+            <a:r>
+              <a:rPr lang="en-US" b="0" i="0" dirty="0">
+                <a:solidFill>
+                  <a:srgbClr val="141414"/>
+                </a:solidFill>
+                <a:effectLst/>
+                <a:latin typeface="Sitka Display" panose="02000505000000020004" pitchFamily="2" charset="0"/>
+              </a:rPr>
+              <a:t>Commonly used in market basket analysis to find product associations</a:t>
+            </a:r>
+            <a:endParaRPr lang="en-US" dirty="0">
+              <a:latin typeface="Sitka Display" panose="02000505000000020004" pitchFamily="2" charset="0"/>
+            </a:endParaRPr>
+          </a:p>
+          <a:p>
+            <a:r>
+              <a:rPr lang="en-US" b="1" dirty="0">
+                <a:latin typeface="Sitka Display" panose="02000505000000020004" pitchFamily="2" charset="0"/>
+              </a:rPr>
+              <a:t>3- Dimensionality Reduction</a:t>
+            </a:r>
+          </a:p>
+          <a:p>
+            <a:pPr lvl="1" fontAlgn="t"/>
+            <a:r>
+              <a:rPr lang="en-US" b="0" i="0" dirty="0">
+                <a:solidFill>
+                  <a:srgbClr val="141414"/>
+                </a:solidFill>
+                <a:effectLst/>
+                <a:latin typeface="Sitka Display" panose="02000505000000020004" pitchFamily="2" charset="0"/>
+              </a:rPr>
+              <a:t>Reduces the number of features while preserving essential information.</a:t>
+            </a:r>
+          </a:p>
+          <a:p>
+            <a:pPr lvl="1" fontAlgn="t"/>
+            <a:r>
+              <a:rPr lang="en-US" b="0" i="0" dirty="0">
+                <a:solidFill>
+                  <a:srgbClr val="141414"/>
+                </a:solidFill>
+                <a:effectLst/>
+                <a:latin typeface="Sitka Display" panose="02000505000000020004" pitchFamily="2" charset="0"/>
+              </a:rPr>
+              <a:t>Techniques include Principal Component Analysis (PCA) and t-Distributed Stochastic Neighbor Embedding (t-SNE).</a:t>
+            </a:r>
+          </a:p>
+          <a:p>
+            <a:pPr lvl="1" fontAlgn="t"/>
+            <a:endParaRPr lang="en-US" b="0" i="0" dirty="0">
+              <a:solidFill>
+                <a:srgbClr val="141414"/>
+              </a:solidFill>
+              <a:effectLst/>
+              <a:latin typeface="Sitka Display" panose="02000505000000020004" pitchFamily="2" charset="0"/>
+            </a:endParaRPr>
+          </a:p>
+          <a:p>
+            <a:endParaRPr lang="en-US" dirty="0">
+              <a:latin typeface="Sitka Display" panose="02000505000000020004" pitchFamily="2" charset="0"/>
+            </a:endParaRPr>
           </a:p>
         </p:txBody>
       </p:sp>
@@ -10205,6 +11516,895 @@
     <p:extLst>
       <p:ext uri="{BB962C8B-B14F-4D97-AF65-F5344CB8AC3E}">
         <p14:creationId xmlns:p14="http://schemas.microsoft.com/office/powerpoint/2010/main" val="3214041167"/>
+      </p:ext>
+    </p:extLst>
+  </p:cSld>
+  <p:clrMapOvr>
+    <a:masterClrMapping/>
+  </p:clrMapOvr>
+</p:sld>
+</file>
+
+<file path=ppt/slides/slide6.xml><?xml version="1.0" encoding="utf-8"?>
+<p:sld xmlns:a="http://schemas.openxmlformats.org/drawingml/2006/main" xmlns:r="http://schemas.openxmlformats.org/officeDocument/2006/relationships" xmlns:p="http://schemas.openxmlformats.org/presentationml/2006/main">
+  <p:cSld>
+    <p:spTree>
+      <p:nvGrpSpPr>
+        <p:cNvPr id="1" name=""/>
+        <p:cNvGrpSpPr/>
+        <p:nvPr/>
+      </p:nvGrpSpPr>
+      <p:grpSpPr>
+        <a:xfrm>
+          <a:off x="0" y="0"/>
+          <a:ext cx="0" cy="0"/>
+          <a:chOff x="0" y="0"/>
+          <a:chExt cx="0" cy="0"/>
+        </a:xfrm>
+      </p:grpSpPr>
+      <p:sp>
+        <p:nvSpPr>
+          <p:cNvPr id="2" name="Title 1">
+            <a:extLst>
+              <a:ext uri="{FF2B5EF4-FFF2-40B4-BE49-F238E27FC236}">
+                <a16:creationId xmlns:a16="http://schemas.microsoft.com/office/drawing/2014/main" id="{C04C3A32-E766-8D7A-F940-F7B71723CE79}"/>
+              </a:ext>
+            </a:extLst>
+          </p:cNvPr>
+          <p:cNvSpPr>
+            <a:spLocks noGrp="1"/>
+          </p:cNvSpPr>
+          <p:nvPr>
+            <p:ph type="title"/>
+          </p:nvPr>
+        </p:nvSpPr>
+        <p:spPr/>
+        <p:txBody>
+          <a:bodyPr/>
+          <a:lstStyle/>
+          <a:p>
+            <a:r>
+              <a:rPr lang="en-US" dirty="0">
+                <a:latin typeface="Sitka Display" panose="02000505000000020004" pitchFamily="2" charset="0"/>
+              </a:rPr>
+              <a:t>Continue</a:t>
+            </a:r>
+            <a:r>
+              <a:rPr lang="en-US" dirty="0"/>
+              <a:t>..</a:t>
+            </a:r>
+          </a:p>
+        </p:txBody>
+      </p:sp>
+      <p:sp>
+        <p:nvSpPr>
+          <p:cNvPr id="3" name="Content Placeholder 2">
+            <a:extLst>
+              <a:ext uri="{FF2B5EF4-FFF2-40B4-BE49-F238E27FC236}">
+                <a16:creationId xmlns:a16="http://schemas.microsoft.com/office/drawing/2014/main" id="{CDB5D920-0AEC-1791-0F23-56FAECFEA151}"/>
+              </a:ext>
+            </a:extLst>
+          </p:cNvPr>
+          <p:cNvSpPr>
+            <a:spLocks noGrp="1"/>
+          </p:cNvSpPr>
+          <p:nvPr>
+            <p:ph idx="1"/>
+          </p:nvPr>
+        </p:nvSpPr>
+        <p:spPr/>
+        <p:txBody>
+          <a:bodyPr>
+            <a:normAutofit/>
+          </a:bodyPr>
+          <a:lstStyle/>
+          <a:p>
+            <a:r>
+              <a:rPr lang="en-US" b="1" dirty="0">
+                <a:latin typeface="Sitka Display" panose="02000505000000020004" pitchFamily="2" charset="0"/>
+              </a:rPr>
+              <a:t>4- Anomaly Detection</a:t>
+            </a:r>
+          </a:p>
+          <a:p>
+            <a:pPr lvl="1" fontAlgn="t"/>
+            <a:r>
+              <a:rPr lang="en-US" b="0" i="0" dirty="0">
+                <a:solidFill>
+                  <a:srgbClr val="141414"/>
+                </a:solidFill>
+                <a:effectLst/>
+                <a:latin typeface="Sitka Display" panose="02000505000000020004" pitchFamily="2" charset="0"/>
+              </a:rPr>
+              <a:t>Identifies outliers or unusual data points that differ significantly from the majority.</a:t>
+            </a:r>
+          </a:p>
+          <a:p>
+            <a:pPr lvl="1" fontAlgn="t"/>
+            <a:r>
+              <a:rPr lang="en-US" b="0" i="0" dirty="0">
+                <a:solidFill>
+                  <a:srgbClr val="141414"/>
+                </a:solidFill>
+                <a:effectLst/>
+                <a:latin typeface="Sitka Display" panose="02000505000000020004" pitchFamily="2" charset="0"/>
+              </a:rPr>
+              <a:t>Useful in fraud detection, network security, and fault detection.</a:t>
+            </a:r>
+            <a:endParaRPr lang="en-US" dirty="0">
+              <a:latin typeface="Sitka Display" panose="02000505000000020004" pitchFamily="2" charset="0"/>
+            </a:endParaRPr>
+          </a:p>
+          <a:p>
+            <a:r>
+              <a:rPr lang="en-US" b="1" dirty="0">
+                <a:latin typeface="Sitka Display" panose="02000505000000020004" pitchFamily="2" charset="0"/>
+              </a:rPr>
+              <a:t>5- Feature Learning</a:t>
+            </a:r>
+          </a:p>
+          <a:p>
+            <a:pPr lvl="1" fontAlgn="t"/>
+            <a:r>
+              <a:rPr lang="en-US" b="0" i="0" dirty="0">
+                <a:solidFill>
+                  <a:srgbClr val="141414"/>
+                </a:solidFill>
+                <a:effectLst/>
+                <a:latin typeface="Sitka Display" panose="02000505000000020004" pitchFamily="2" charset="0"/>
+              </a:rPr>
+              <a:t>Automatically extracts relevant features from raw data.</a:t>
+            </a:r>
+          </a:p>
+          <a:p>
+            <a:pPr lvl="1" fontAlgn="t"/>
+            <a:r>
+              <a:rPr lang="en-US" b="0" i="0" dirty="0">
+                <a:solidFill>
+                  <a:srgbClr val="141414"/>
+                </a:solidFill>
+                <a:effectLst/>
+                <a:latin typeface="Sitka Display" panose="02000505000000020004" pitchFamily="2" charset="0"/>
+              </a:rPr>
+              <a:t>Often used in deep learning models to improve performance on tasks like image and speech recognition.</a:t>
+            </a:r>
+          </a:p>
+          <a:p>
+            <a:endParaRPr lang="en-US" dirty="0">
+              <a:latin typeface="Sitka Display" panose="02000505000000020004" pitchFamily="2" charset="0"/>
+            </a:endParaRPr>
+          </a:p>
+        </p:txBody>
+      </p:sp>
+    </p:spTree>
+    <p:extLst>
+      <p:ext uri="{BB962C8B-B14F-4D97-AF65-F5344CB8AC3E}">
+        <p14:creationId xmlns:p14="http://schemas.microsoft.com/office/powerpoint/2010/main" val="2106415228"/>
+      </p:ext>
+    </p:extLst>
+  </p:cSld>
+  <p:clrMapOvr>
+    <a:masterClrMapping/>
+  </p:clrMapOvr>
+</p:sld>
+</file>
+
+<file path=ppt/slides/slide7.xml><?xml version="1.0" encoding="utf-8"?>
+<p:sld xmlns:a="http://schemas.openxmlformats.org/drawingml/2006/main" xmlns:r="http://schemas.openxmlformats.org/officeDocument/2006/relationships" xmlns:p="http://schemas.openxmlformats.org/presentationml/2006/main">
+  <p:cSld>
+    <p:spTree>
+      <p:nvGrpSpPr>
+        <p:cNvPr id="1" name=""/>
+        <p:cNvGrpSpPr/>
+        <p:nvPr/>
+      </p:nvGrpSpPr>
+      <p:grpSpPr>
+        <a:xfrm>
+          <a:off x="0" y="0"/>
+          <a:ext cx="0" cy="0"/>
+          <a:chOff x="0" y="0"/>
+          <a:chExt cx="0" cy="0"/>
+        </a:xfrm>
+      </p:grpSpPr>
+      <p:sp>
+        <p:nvSpPr>
+          <p:cNvPr id="2" name="Title 1">
+            <a:extLst>
+              <a:ext uri="{FF2B5EF4-FFF2-40B4-BE49-F238E27FC236}">
+                <a16:creationId xmlns:a16="http://schemas.microsoft.com/office/drawing/2014/main" id="{BA642662-949C-8E3A-CA17-B44B6DFC4D87}"/>
+              </a:ext>
+            </a:extLst>
+          </p:cNvPr>
+          <p:cNvSpPr>
+            <a:spLocks noGrp="1"/>
+          </p:cNvSpPr>
+          <p:nvPr>
+            <p:ph type="title"/>
+          </p:nvPr>
+        </p:nvSpPr>
+        <p:spPr/>
+        <p:txBody>
+          <a:bodyPr/>
+          <a:lstStyle/>
+          <a:p>
+            <a:r>
+              <a:rPr lang="en-US" dirty="0">
+                <a:latin typeface="Sitka Display" panose="02000505000000020004" pitchFamily="2" charset="0"/>
+              </a:rPr>
+              <a:t>Clustering</a:t>
+            </a:r>
+          </a:p>
+        </p:txBody>
+      </p:sp>
+      <p:sp>
+        <p:nvSpPr>
+          <p:cNvPr id="3" name="Content Placeholder 2">
+            <a:extLst>
+              <a:ext uri="{FF2B5EF4-FFF2-40B4-BE49-F238E27FC236}">
+                <a16:creationId xmlns:a16="http://schemas.microsoft.com/office/drawing/2014/main" id="{FE7A19D0-2B0F-DF59-8357-C03D7A624E0F}"/>
+              </a:ext>
+            </a:extLst>
+          </p:cNvPr>
+          <p:cNvSpPr>
+            <a:spLocks noGrp="1"/>
+          </p:cNvSpPr>
+          <p:nvPr>
+            <p:ph idx="1"/>
+          </p:nvPr>
+        </p:nvSpPr>
+        <p:spPr/>
+        <p:txBody>
+          <a:bodyPr>
+            <a:normAutofit fontScale="70000" lnSpcReduction="20000"/>
+          </a:bodyPr>
+          <a:lstStyle/>
+          <a:p>
+            <a:pPr algn="l" fontAlgn="t"/>
+            <a:r>
+              <a:rPr lang="en-US" sz="3200" b="1" i="0" dirty="0">
+                <a:effectLst/>
+                <a:latin typeface="Sitka Display" panose="02000505000000020004" pitchFamily="2" charset="0"/>
+              </a:rPr>
+              <a:t>Clustering</a:t>
+            </a:r>
+            <a:r>
+              <a:rPr lang="en-US" sz="3200" b="0" i="0" dirty="0">
+                <a:effectLst/>
+                <a:latin typeface="Sitka Display" panose="02000505000000020004" pitchFamily="2" charset="0"/>
+              </a:rPr>
+              <a:t> is a data analysis technique used to group similar items or data points based on specific characteristics. It is commonly applied in various fields such as machine learning, statistics, and data mining.</a:t>
+            </a:r>
+          </a:p>
+          <a:p>
+            <a:pPr algn="l" fontAlgn="t">
+              <a:buFont typeface="Arial" panose="020B0604020202020204" pitchFamily="34" charset="0"/>
+              <a:buChar char="•"/>
+            </a:pPr>
+            <a:r>
+              <a:rPr lang="en-US" sz="3200" dirty="0">
+                <a:latin typeface="Sitka Display" panose="02000505000000020004" pitchFamily="2" charset="0"/>
+              </a:rPr>
+              <a:t>I</a:t>
+            </a:r>
+            <a:r>
+              <a:rPr lang="en-US" sz="3200" b="0" i="0" dirty="0">
+                <a:effectLst/>
+                <a:latin typeface="Sitka Display" panose="02000505000000020004" pitchFamily="2" charset="0"/>
+              </a:rPr>
+              <a:t>nvolves </a:t>
+            </a:r>
+            <a:r>
+              <a:rPr lang="en-US" sz="3200" b="1" i="0" dirty="0">
+                <a:effectLst/>
+                <a:latin typeface="Sitka Display" panose="02000505000000020004" pitchFamily="2" charset="0"/>
+              </a:rPr>
+              <a:t>partitioning a dataset into subsets (</a:t>
+            </a:r>
+            <a:r>
+              <a:rPr lang="en-US" sz="3200" b="1" i="0" u="sng" dirty="0">
+                <a:effectLst/>
+                <a:latin typeface="Sitka Display" panose="02000505000000020004" pitchFamily="2" charset="0"/>
+              </a:rPr>
+              <a:t>clusters</a:t>
+            </a:r>
+            <a:r>
+              <a:rPr lang="en-US" sz="3200" b="1" i="0" dirty="0">
+                <a:effectLst/>
+                <a:latin typeface="Sitka Display" panose="02000505000000020004" pitchFamily="2" charset="0"/>
+              </a:rPr>
+              <a:t>) </a:t>
+            </a:r>
+            <a:r>
+              <a:rPr lang="en-US" sz="3200" b="0" i="0" dirty="0">
+                <a:effectLst/>
+                <a:latin typeface="Sitka Display" panose="02000505000000020004" pitchFamily="2" charset="0"/>
+              </a:rPr>
+              <a:t>where items in the same cluster are more similar to each other than to those in other clusters.</a:t>
+            </a:r>
+          </a:p>
+          <a:p>
+            <a:pPr algn="l" fontAlgn="t">
+              <a:buFont typeface="Arial" panose="020B0604020202020204" pitchFamily="34" charset="0"/>
+              <a:buChar char="•"/>
+            </a:pPr>
+            <a:r>
+              <a:rPr lang="en-US" sz="3200" b="0" i="0" dirty="0">
+                <a:effectLst/>
+                <a:latin typeface="Sitka Display" panose="02000505000000020004" pitchFamily="2" charset="0"/>
+              </a:rPr>
+              <a:t>It helps in identifying patterns, simplifying data analysis, and making predictions.</a:t>
+            </a:r>
+          </a:p>
+          <a:p>
+            <a:pPr algn="l" fontAlgn="t"/>
+            <a:r>
+              <a:rPr lang="en-US" sz="3200" b="1" i="0" dirty="0">
+                <a:effectLst/>
+                <a:latin typeface="Sitka Display" panose="02000505000000020004" pitchFamily="2" charset="0"/>
+              </a:rPr>
+              <a:t>Common Algorithms</a:t>
+            </a:r>
+            <a:r>
+              <a:rPr lang="en-US" sz="3200" b="0" i="0" dirty="0">
+                <a:effectLst/>
+                <a:latin typeface="Sitka Display" panose="02000505000000020004" pitchFamily="2" charset="0"/>
+              </a:rPr>
+              <a:t>:</a:t>
+            </a:r>
+          </a:p>
+          <a:p>
+            <a:pPr lvl="1" fontAlgn="t"/>
+            <a:r>
+              <a:rPr lang="en-US" sz="2800" b="1" i="0" dirty="0">
+                <a:effectLst/>
+                <a:latin typeface="Sitka Display" panose="02000505000000020004" pitchFamily="2" charset="0"/>
+              </a:rPr>
+              <a:t>K-Means:</a:t>
+            </a:r>
+            <a:r>
+              <a:rPr lang="en-US" sz="2800" b="0" i="0" dirty="0">
+                <a:effectLst/>
+                <a:latin typeface="Sitka Display" panose="02000505000000020004" pitchFamily="2" charset="0"/>
+              </a:rPr>
+              <a:t> Divides data into K clusters by minimizing variance within each cluster.</a:t>
+            </a:r>
+          </a:p>
+          <a:p>
+            <a:pPr lvl="1" fontAlgn="t"/>
+            <a:r>
+              <a:rPr lang="en-US" sz="2800" b="1" i="0" dirty="0">
+                <a:effectLst/>
+                <a:latin typeface="Sitka Display" panose="02000505000000020004" pitchFamily="2" charset="0"/>
+              </a:rPr>
+              <a:t>Hierarchical Clustering</a:t>
+            </a:r>
+            <a:r>
+              <a:rPr lang="en-US" sz="2800" b="0" i="0" dirty="0">
+                <a:effectLst/>
+                <a:latin typeface="Sitka Display" panose="02000505000000020004" pitchFamily="2" charset="0"/>
+              </a:rPr>
+              <a:t>: Builds a tree of clusters based on distance metrics.</a:t>
+            </a:r>
+          </a:p>
+          <a:p>
+            <a:pPr lvl="1" fontAlgn="t"/>
+            <a:r>
+              <a:rPr lang="en-US" sz="2800" b="1" i="0" dirty="0">
+                <a:effectLst/>
+                <a:latin typeface="Sitka Display" panose="02000505000000020004" pitchFamily="2" charset="0"/>
+              </a:rPr>
+              <a:t>DBSCAN:</a:t>
+            </a:r>
+            <a:r>
+              <a:rPr lang="en-US" sz="2800" b="0" i="0" dirty="0">
+                <a:effectLst/>
+                <a:latin typeface="Sitka Display" panose="02000505000000020004" pitchFamily="2" charset="0"/>
+              </a:rPr>
+              <a:t> Groups points that are closely packed together while marking outliers as noise.</a:t>
+            </a:r>
+          </a:p>
+          <a:p>
+            <a:endParaRPr lang="en-US" dirty="0">
+              <a:latin typeface="Sitka Display" panose="02000505000000020004" pitchFamily="2" charset="0"/>
+            </a:endParaRPr>
+          </a:p>
+        </p:txBody>
+      </p:sp>
+    </p:spTree>
+    <p:extLst>
+      <p:ext uri="{BB962C8B-B14F-4D97-AF65-F5344CB8AC3E}">
+        <p14:creationId xmlns:p14="http://schemas.microsoft.com/office/powerpoint/2010/main" val="3240904292"/>
+      </p:ext>
+    </p:extLst>
+  </p:cSld>
+  <p:clrMapOvr>
+    <a:masterClrMapping/>
+  </p:clrMapOvr>
+</p:sld>
+</file>
+
+<file path=ppt/slides/slide8.xml><?xml version="1.0" encoding="utf-8"?>
+<p:sld xmlns:a="http://schemas.openxmlformats.org/drawingml/2006/main" xmlns:r="http://schemas.openxmlformats.org/officeDocument/2006/relationships" xmlns:p="http://schemas.openxmlformats.org/presentationml/2006/main">
+  <p:cSld>
+    <p:spTree>
+      <p:nvGrpSpPr>
+        <p:cNvPr id="1" name=""/>
+        <p:cNvGrpSpPr/>
+        <p:nvPr/>
+      </p:nvGrpSpPr>
+      <p:grpSpPr>
+        <a:xfrm>
+          <a:off x="0" y="0"/>
+          <a:ext cx="0" cy="0"/>
+          <a:chOff x="0" y="0"/>
+          <a:chExt cx="0" cy="0"/>
+        </a:xfrm>
+      </p:grpSpPr>
+      <p:sp>
+        <p:nvSpPr>
+          <p:cNvPr id="2" name="Title 1">
+            <a:extLst>
+              <a:ext uri="{FF2B5EF4-FFF2-40B4-BE49-F238E27FC236}">
+                <a16:creationId xmlns:a16="http://schemas.microsoft.com/office/drawing/2014/main" id="{F6BDF65B-6560-31E6-052E-28F9FF8D6FF4}"/>
+              </a:ext>
+            </a:extLst>
+          </p:cNvPr>
+          <p:cNvSpPr>
+            <a:spLocks noGrp="1"/>
+          </p:cNvSpPr>
+          <p:nvPr>
+            <p:ph type="title"/>
+          </p:nvPr>
+        </p:nvSpPr>
+        <p:spPr/>
+        <p:txBody>
+          <a:bodyPr/>
+          <a:lstStyle/>
+          <a:p>
+            <a:r>
+              <a:rPr lang="en-US" dirty="0">
+                <a:latin typeface="Sitka Display" panose="02000505000000020004" pitchFamily="2" charset="0"/>
+              </a:rPr>
+              <a:t>Continue..</a:t>
+            </a:r>
+          </a:p>
+        </p:txBody>
+      </p:sp>
+      <p:sp>
+        <p:nvSpPr>
+          <p:cNvPr id="3" name="Content Placeholder 2">
+            <a:extLst>
+              <a:ext uri="{FF2B5EF4-FFF2-40B4-BE49-F238E27FC236}">
+                <a16:creationId xmlns:a16="http://schemas.microsoft.com/office/drawing/2014/main" id="{44994876-784C-71FE-1028-67845EF63BD6}"/>
+              </a:ext>
+            </a:extLst>
+          </p:cNvPr>
+          <p:cNvSpPr>
+            <a:spLocks noGrp="1"/>
+          </p:cNvSpPr>
+          <p:nvPr>
+            <p:ph idx="1"/>
+          </p:nvPr>
+        </p:nvSpPr>
+        <p:spPr/>
+        <p:txBody>
+          <a:bodyPr>
+            <a:normAutofit fontScale="92500" lnSpcReduction="20000"/>
+          </a:bodyPr>
+          <a:lstStyle/>
+          <a:p>
+            <a:pPr algn="l" fontAlgn="t"/>
+            <a:r>
+              <a:rPr lang="en-US" sz="2800" b="1" i="0" dirty="0">
+                <a:solidFill>
+                  <a:srgbClr val="141414"/>
+                </a:solidFill>
+                <a:effectLst/>
+                <a:latin typeface="Sitka Display" panose="02000505000000020004" pitchFamily="2" charset="0"/>
+              </a:rPr>
+              <a:t>Applications</a:t>
+            </a:r>
+            <a:r>
+              <a:rPr lang="en-US" sz="2800" b="0" i="0" dirty="0">
+                <a:solidFill>
+                  <a:srgbClr val="141414"/>
+                </a:solidFill>
+                <a:effectLst/>
+                <a:latin typeface="Sitka Display" panose="02000505000000020004" pitchFamily="2" charset="0"/>
+              </a:rPr>
+              <a:t>:</a:t>
+            </a:r>
+          </a:p>
+          <a:p>
+            <a:pPr lvl="1" fontAlgn="t"/>
+            <a:r>
+              <a:rPr lang="en-US" b="1" i="0" dirty="0">
+                <a:solidFill>
+                  <a:srgbClr val="141414"/>
+                </a:solidFill>
+                <a:effectLst/>
+                <a:latin typeface="Sitka Display" panose="02000505000000020004" pitchFamily="2" charset="0"/>
+              </a:rPr>
+              <a:t>Market Segmentation</a:t>
+            </a:r>
+            <a:r>
+              <a:rPr lang="en-US" b="0" i="0" dirty="0">
+                <a:solidFill>
+                  <a:srgbClr val="141414"/>
+                </a:solidFill>
+                <a:effectLst/>
+                <a:latin typeface="Sitka Display" panose="02000505000000020004" pitchFamily="2" charset="0"/>
+              </a:rPr>
+              <a:t>: Identifying distinct customer groups for targeted marketing.</a:t>
+            </a:r>
+          </a:p>
+          <a:p>
+            <a:pPr lvl="1" fontAlgn="t"/>
+            <a:r>
+              <a:rPr lang="en-US" b="1" i="0" dirty="0">
+                <a:solidFill>
+                  <a:srgbClr val="141414"/>
+                </a:solidFill>
+                <a:effectLst/>
+                <a:latin typeface="Sitka Display" panose="02000505000000020004" pitchFamily="2" charset="0"/>
+              </a:rPr>
+              <a:t>Image Segmentation</a:t>
+            </a:r>
+            <a:r>
+              <a:rPr lang="en-US" b="0" i="0" dirty="0">
+                <a:solidFill>
+                  <a:srgbClr val="141414"/>
+                </a:solidFill>
+                <a:effectLst/>
+                <a:latin typeface="Sitka Display" panose="02000505000000020004" pitchFamily="2" charset="0"/>
+              </a:rPr>
+              <a:t>: Grouping pixels in images for analysis.</a:t>
+            </a:r>
+          </a:p>
+          <a:p>
+            <a:pPr lvl="1" fontAlgn="t"/>
+            <a:r>
+              <a:rPr lang="en-US" b="1" i="0" dirty="0">
+                <a:solidFill>
+                  <a:srgbClr val="141414"/>
+                </a:solidFill>
+                <a:effectLst/>
+                <a:latin typeface="Sitka Display" panose="02000505000000020004" pitchFamily="2" charset="0"/>
+              </a:rPr>
+              <a:t>Anomaly Detection</a:t>
+            </a:r>
+            <a:r>
+              <a:rPr lang="en-US" b="0" i="0" dirty="0">
+                <a:solidFill>
+                  <a:srgbClr val="141414"/>
+                </a:solidFill>
+                <a:effectLst/>
+                <a:latin typeface="Sitka Display" panose="02000505000000020004" pitchFamily="2" charset="0"/>
+              </a:rPr>
+              <a:t>: Identifying unusual data points that do not fit into any cluster.</a:t>
+            </a:r>
+          </a:p>
+          <a:p>
+            <a:pPr fontAlgn="t"/>
+            <a:r>
+              <a:rPr lang="en-US" b="1" i="0" dirty="0">
+                <a:solidFill>
+                  <a:srgbClr val="141414"/>
+                </a:solidFill>
+                <a:effectLst/>
+                <a:latin typeface="Sitka Display" panose="02000505000000020004" pitchFamily="2" charset="0"/>
+              </a:rPr>
+              <a:t>Evaluation Metrics:</a:t>
+            </a:r>
+          </a:p>
+          <a:p>
+            <a:pPr lvl="1" fontAlgn="t"/>
+            <a:r>
+              <a:rPr lang="en-US" b="1" i="0" dirty="0">
+                <a:solidFill>
+                  <a:srgbClr val="141414"/>
+                </a:solidFill>
+                <a:effectLst/>
+                <a:latin typeface="Sitka Display" panose="02000505000000020004" pitchFamily="2" charset="0"/>
+              </a:rPr>
+              <a:t>Silhouette Score</a:t>
+            </a:r>
+            <a:r>
+              <a:rPr lang="en-US" b="0" i="0" dirty="0">
+                <a:solidFill>
+                  <a:srgbClr val="141414"/>
+                </a:solidFill>
+                <a:effectLst/>
+                <a:latin typeface="Sitka Display" panose="02000505000000020004" pitchFamily="2" charset="0"/>
+              </a:rPr>
+              <a:t>: Measures how similar an object is to its own cluster compared to other clusters.</a:t>
+            </a:r>
+          </a:p>
+          <a:p>
+            <a:pPr lvl="1" fontAlgn="t"/>
+            <a:r>
+              <a:rPr lang="en-US" b="1" i="0" dirty="0">
+                <a:solidFill>
+                  <a:srgbClr val="141414"/>
+                </a:solidFill>
+                <a:effectLst/>
+                <a:latin typeface="Sitka Display" panose="02000505000000020004" pitchFamily="2" charset="0"/>
+              </a:rPr>
+              <a:t>Dunn Index</a:t>
+            </a:r>
+            <a:r>
+              <a:rPr lang="en-US" b="0" i="0" dirty="0">
+                <a:solidFill>
+                  <a:srgbClr val="141414"/>
+                </a:solidFill>
+                <a:effectLst/>
+                <a:latin typeface="Sitka Display" panose="02000505000000020004" pitchFamily="2" charset="0"/>
+              </a:rPr>
+              <a:t>: Evaluates the compactness and separation of clusters.</a:t>
+            </a:r>
+          </a:p>
+          <a:p>
+            <a:pPr fontAlgn="t"/>
+            <a:r>
+              <a:rPr lang="en-US" b="1" i="0" dirty="0">
+                <a:solidFill>
+                  <a:srgbClr val="141414"/>
+                </a:solidFill>
+                <a:effectLst/>
+                <a:latin typeface="Sitka Display" panose="02000505000000020004" pitchFamily="2" charset="0"/>
+              </a:rPr>
+              <a:t>Clustering </a:t>
+            </a:r>
+            <a:r>
+              <a:rPr lang="en-US" b="0" i="0" dirty="0">
+                <a:solidFill>
+                  <a:srgbClr val="141414"/>
+                </a:solidFill>
+                <a:effectLst/>
+                <a:latin typeface="Sitka Display" panose="02000505000000020004" pitchFamily="2" charset="0"/>
+              </a:rPr>
+              <a:t>is a powerful tool for exploratory data analysis and can provide insights that guide decision-making across various domains.</a:t>
+            </a:r>
+          </a:p>
+          <a:p>
+            <a:endParaRPr lang="en-US" dirty="0">
+              <a:latin typeface="Sitka Display" panose="02000505000000020004" pitchFamily="2" charset="0"/>
+            </a:endParaRPr>
+          </a:p>
+        </p:txBody>
+      </p:sp>
+    </p:spTree>
+    <p:extLst>
+      <p:ext uri="{BB962C8B-B14F-4D97-AF65-F5344CB8AC3E}">
+        <p14:creationId xmlns:p14="http://schemas.microsoft.com/office/powerpoint/2010/main" val="604970175"/>
+      </p:ext>
+    </p:extLst>
+  </p:cSld>
+  <p:clrMapOvr>
+    <a:masterClrMapping/>
+  </p:clrMapOvr>
+</p:sld>
+</file>
+
+<file path=ppt/slides/slide9.xml><?xml version="1.0" encoding="utf-8"?>
+<p:sld xmlns:a="http://schemas.openxmlformats.org/drawingml/2006/main" xmlns:r="http://schemas.openxmlformats.org/officeDocument/2006/relationships" xmlns:p="http://schemas.openxmlformats.org/presentationml/2006/main">
+  <p:cSld>
+    <p:spTree>
+      <p:nvGrpSpPr>
+        <p:cNvPr id="1" name=""/>
+        <p:cNvGrpSpPr/>
+        <p:nvPr/>
+      </p:nvGrpSpPr>
+      <p:grpSpPr>
+        <a:xfrm>
+          <a:off x="0" y="0"/>
+          <a:ext cx="0" cy="0"/>
+          <a:chOff x="0" y="0"/>
+          <a:chExt cx="0" cy="0"/>
+        </a:xfrm>
+      </p:grpSpPr>
+      <p:sp>
+        <p:nvSpPr>
+          <p:cNvPr id="2" name="Title 1">
+            <a:extLst>
+              <a:ext uri="{FF2B5EF4-FFF2-40B4-BE49-F238E27FC236}">
+                <a16:creationId xmlns:a16="http://schemas.microsoft.com/office/drawing/2014/main" id="{4C6270C6-4F9A-4D54-1705-B70B4307D67C}"/>
+              </a:ext>
+            </a:extLst>
+          </p:cNvPr>
+          <p:cNvSpPr>
+            <a:spLocks noGrp="1"/>
+          </p:cNvSpPr>
+          <p:nvPr>
+            <p:ph type="title"/>
+          </p:nvPr>
+        </p:nvSpPr>
+        <p:spPr/>
+        <p:txBody>
+          <a:bodyPr>
+            <a:normAutofit/>
+          </a:bodyPr>
+          <a:lstStyle/>
+          <a:p>
+            <a:r>
+              <a:rPr lang="en-US" b="1" i="0" dirty="0">
+                <a:solidFill>
+                  <a:srgbClr val="141414"/>
+                </a:solidFill>
+                <a:effectLst/>
+                <a:latin typeface="Sitka Display" panose="02000505000000020004" pitchFamily="2" charset="0"/>
+              </a:rPr>
+              <a:t>Key Terms in Clustering</a:t>
+            </a:r>
+            <a:endParaRPr lang="en-US" b="1" dirty="0">
+              <a:latin typeface="Sitka Display" panose="02000505000000020004" pitchFamily="2" charset="0"/>
+            </a:endParaRPr>
+          </a:p>
+        </p:txBody>
+      </p:sp>
+      <p:sp>
+        <p:nvSpPr>
+          <p:cNvPr id="3" name="Content Placeholder 2">
+            <a:extLst>
+              <a:ext uri="{FF2B5EF4-FFF2-40B4-BE49-F238E27FC236}">
+                <a16:creationId xmlns:a16="http://schemas.microsoft.com/office/drawing/2014/main" id="{89F05D6F-DDFB-18D1-CF84-E979D02F3C4B}"/>
+              </a:ext>
+            </a:extLst>
+          </p:cNvPr>
+          <p:cNvSpPr>
+            <a:spLocks noGrp="1"/>
+          </p:cNvSpPr>
+          <p:nvPr>
+            <p:ph idx="1"/>
+          </p:nvPr>
+        </p:nvSpPr>
+        <p:spPr/>
+        <p:txBody>
+          <a:bodyPr>
+            <a:noAutofit/>
+          </a:bodyPr>
+          <a:lstStyle/>
+          <a:p>
+            <a:pPr algn="l" fontAlgn="t">
+              <a:buFont typeface="Arial" panose="020B0604020202020204" pitchFamily="34" charset="0"/>
+              <a:buChar char="•"/>
+            </a:pPr>
+            <a:r>
+              <a:rPr lang="en-US" sz="2400" b="1" i="0" dirty="0">
+                <a:solidFill>
+                  <a:srgbClr val="141414"/>
+                </a:solidFill>
+                <a:effectLst/>
+                <a:latin typeface="Sitka Display" panose="02000505000000020004" pitchFamily="2" charset="0"/>
+              </a:rPr>
+              <a:t>Cluster:</a:t>
+            </a:r>
+            <a:r>
+              <a:rPr lang="en-US" sz="2400" b="0" i="0" dirty="0">
+                <a:solidFill>
+                  <a:srgbClr val="141414"/>
+                </a:solidFill>
+                <a:effectLst/>
+                <a:latin typeface="Sitka Display" panose="02000505000000020004" pitchFamily="2" charset="0"/>
+              </a:rPr>
+              <a:t> A collection of data points that are more similar to each other than to those in other clusters.</a:t>
+            </a:r>
+          </a:p>
+          <a:p>
+            <a:pPr algn="l" fontAlgn="t">
+              <a:buFont typeface="Arial" panose="020B0604020202020204" pitchFamily="34" charset="0"/>
+              <a:buChar char="•"/>
+            </a:pPr>
+            <a:r>
+              <a:rPr lang="en-US" sz="2400" b="1" i="0" dirty="0">
+                <a:solidFill>
+                  <a:srgbClr val="141414"/>
+                </a:solidFill>
+                <a:effectLst/>
+                <a:latin typeface="Sitka Display" panose="02000505000000020004" pitchFamily="2" charset="0"/>
+              </a:rPr>
+              <a:t>Centroid</a:t>
+            </a:r>
+            <a:r>
+              <a:rPr lang="en-US" sz="2400" b="0" i="0" dirty="0">
+                <a:solidFill>
+                  <a:srgbClr val="141414"/>
+                </a:solidFill>
+                <a:effectLst/>
+                <a:latin typeface="Sitka Display" panose="02000505000000020004" pitchFamily="2" charset="0"/>
+              </a:rPr>
+              <a:t>: The center point of a cluster, often calculated as the mean of all points in the cluster.</a:t>
+            </a:r>
+          </a:p>
+          <a:p>
+            <a:pPr algn="l" fontAlgn="t">
+              <a:buFont typeface="Arial" panose="020B0604020202020204" pitchFamily="34" charset="0"/>
+              <a:buChar char="•"/>
+            </a:pPr>
+            <a:r>
+              <a:rPr lang="en-US" sz="2400" b="1" i="0" dirty="0">
+                <a:solidFill>
+                  <a:srgbClr val="141414"/>
+                </a:solidFill>
+                <a:effectLst/>
+                <a:latin typeface="Sitka Display" panose="02000505000000020004" pitchFamily="2" charset="0"/>
+              </a:rPr>
+              <a:t>Distance Metric</a:t>
+            </a:r>
+            <a:r>
+              <a:rPr lang="en-US" sz="2400" b="0" i="0" dirty="0">
+                <a:solidFill>
+                  <a:srgbClr val="141414"/>
+                </a:solidFill>
+                <a:effectLst/>
+                <a:latin typeface="Sitka Display" panose="02000505000000020004" pitchFamily="2" charset="0"/>
+              </a:rPr>
+              <a:t>: A method for measuring the distance between data points, commonly using Euclidean or Manhattan distance.</a:t>
+            </a:r>
+          </a:p>
+          <a:p>
+            <a:pPr algn="l" fontAlgn="t">
+              <a:buFont typeface="Arial" panose="020B0604020202020204" pitchFamily="34" charset="0"/>
+              <a:buChar char="•"/>
+            </a:pPr>
+            <a:r>
+              <a:rPr lang="en-US" sz="2400" b="1" i="0" dirty="0">
+                <a:solidFill>
+                  <a:srgbClr val="141414"/>
+                </a:solidFill>
+                <a:effectLst/>
+                <a:latin typeface="Sitka Display" panose="02000505000000020004" pitchFamily="2" charset="0"/>
+              </a:rPr>
+              <a:t>Inertia: </a:t>
+            </a:r>
+            <a:r>
+              <a:rPr lang="en-US" sz="2400" b="0" i="0" dirty="0">
+                <a:solidFill>
+                  <a:srgbClr val="141414"/>
+                </a:solidFill>
+                <a:effectLst/>
+                <a:latin typeface="Sitka Display" panose="02000505000000020004" pitchFamily="2" charset="0"/>
+              </a:rPr>
+              <a:t>A measure of how tightly the clusters are packed, calculated as the sum of squared distances between points and their respective centroids.</a:t>
+            </a:r>
+          </a:p>
+          <a:p>
+            <a:pPr algn="l" fontAlgn="t">
+              <a:buFont typeface="Arial" panose="020B0604020202020204" pitchFamily="34" charset="0"/>
+              <a:buChar char="•"/>
+            </a:pPr>
+            <a:r>
+              <a:rPr lang="en-US" sz="2400" b="1" i="0" dirty="0">
+                <a:solidFill>
+                  <a:srgbClr val="141414"/>
+                </a:solidFill>
+                <a:effectLst/>
+                <a:latin typeface="Sitka Display" panose="02000505000000020004" pitchFamily="2" charset="0"/>
+              </a:rPr>
+              <a:t>Silhouette Score: </a:t>
+            </a:r>
+            <a:r>
+              <a:rPr lang="en-US" sz="2400" b="0" i="0" dirty="0">
+                <a:solidFill>
+                  <a:srgbClr val="141414"/>
+                </a:solidFill>
+                <a:effectLst/>
+                <a:latin typeface="Sitka Display" panose="02000505000000020004" pitchFamily="2" charset="0"/>
+              </a:rPr>
+              <a:t>A metric that evaluates how similar an object is to its own cluster compared to other clusters, ranging from -1 to 1.</a:t>
+            </a:r>
+          </a:p>
+          <a:p>
+            <a:endParaRPr lang="en-US" sz="2400" dirty="0">
+              <a:latin typeface="Sitka Display" panose="02000505000000020004" pitchFamily="2" charset="0"/>
+            </a:endParaRPr>
+          </a:p>
+        </p:txBody>
+      </p:sp>
+    </p:spTree>
+    <p:extLst>
+      <p:ext uri="{BB962C8B-B14F-4D97-AF65-F5344CB8AC3E}">
+        <p14:creationId xmlns:p14="http://schemas.microsoft.com/office/powerpoint/2010/main" val="1250186532"/>
       </p:ext>
     </p:extLst>
   </p:cSld>
